--- a/output/wordlabs-operate-3day.pptx
+++ b/output/wordlabs-operate-3day.pptx
@@ -5622,7 +5622,7 @@
                 <a:ea typeface="Trebuchet MS" pitchFamily="34" charset="-122"/>
                 <a:cs typeface="Trebuchet MS" pitchFamily="34" charset="-120"/>
               </a:rPr>
-              <a:t>0</a:t>
+              <a:t>1</a:t>
             </a:r>
             <a:pPr algn="ctr" indent="0" marL="0">
               <a:buNone/>
@@ -6040,7 +6040,7 @@
                 <a:ea typeface="Calibri" pitchFamily="34" charset="-122"/>
                 <a:cs typeface="Calibri" pitchFamily="34" charset="-120"/>
               </a:rPr>
-              <a:t>The team decided to </a:t>
+              <a:t>The students learned to </a:t>
             </a:r>
             <a:pPr algn="l" indent="0" marL="0">
               <a:buNone/>
@@ -6071,7 +6071,7 @@
                 <a:ea typeface="Calibri" pitchFamily="34" charset="-122"/>
                 <a:cs typeface="Calibri" pitchFamily="34" charset="-120"/>
               </a:rPr>
-              <a:t> so the </a:t>
+              <a:t> during the science </a:t>
             </a:r>
             <a:pPr algn="l" indent="0" marL="0">
               <a:buNone/>
@@ -6102,7 +6102,7 @@
                 <a:ea typeface="Calibri" pitchFamily="34" charset="-122"/>
                 <a:cs typeface="Calibri" pitchFamily="34" charset="-120"/>
               </a:rPr>
-              <a:t> could be completed on time.</a:t>
+              <a:t>, which was exciting!</a:t>
             </a:r>
             <a:endParaRPr lang="en-US" sz="1800" dirty="0"/>
           </a:p>
@@ -10865,7 +10865,7 @@
         </p:nvSpPr>
         <p:spPr>
           <a:xfrm>
-            <a:off x="2023872" y="4169664"/>
+            <a:off x="2124837" y="4169664"/>
             <a:ext cx="685800" cy="384048"/>
           </a:xfrm>
           <a:prstGeom prst="rect">
@@ -10892,7 +10892,7 @@
         </p:nvSpPr>
         <p:spPr>
           <a:xfrm>
-            <a:off x="2023872" y="4169664"/>
+            <a:off x="2124837" y="4169664"/>
             <a:ext cx="685800" cy="384048"/>
           </a:xfrm>
           <a:prstGeom prst="rect">
@@ -10931,7 +10931,7 @@
         </p:nvSpPr>
         <p:spPr>
           <a:xfrm>
-            <a:off x="2023872" y="4572000"/>
+            <a:off x="2124837" y="4572000"/>
             <a:ext cx="685800" cy="219456"/>
           </a:xfrm>
           <a:prstGeom prst="rect">
@@ -10970,7 +10970,7 @@
         </p:nvSpPr>
         <p:spPr>
           <a:xfrm>
-            <a:off x="2831592" y="4169664"/>
+            <a:off x="3033522" y="4169664"/>
             <a:ext cx="685800" cy="384048"/>
           </a:xfrm>
           <a:prstGeom prst="rect">
@@ -10997,7 +10997,7 @@
         </p:nvSpPr>
         <p:spPr>
           <a:xfrm>
-            <a:off x="2831592" y="4169664"/>
+            <a:off x="3033522" y="4169664"/>
             <a:ext cx="685800" cy="384048"/>
           </a:xfrm>
           <a:prstGeom prst="rect">
@@ -11036,7 +11036,7 @@
         </p:nvSpPr>
         <p:spPr>
           <a:xfrm>
-            <a:off x="3639312" y="4169664"/>
+            <a:off x="3942207" y="4169664"/>
             <a:ext cx="685800" cy="384048"/>
           </a:xfrm>
           <a:prstGeom prst="rect">
@@ -11063,7 +11063,7 @@
         </p:nvSpPr>
         <p:spPr>
           <a:xfrm>
-            <a:off x="3639312" y="4169664"/>
+            <a:off x="3942207" y="4169664"/>
             <a:ext cx="685800" cy="384048"/>
           </a:xfrm>
           <a:prstGeom prst="rect">
@@ -11102,7 +11102,7 @@
         </p:nvSpPr>
         <p:spPr>
           <a:xfrm>
-            <a:off x="4447032" y="4169664"/>
+            <a:off x="4850892" y="4169664"/>
             <a:ext cx="685800" cy="384048"/>
           </a:xfrm>
           <a:prstGeom prst="rect">
@@ -11129,7 +11129,7 @@
         </p:nvSpPr>
         <p:spPr>
           <a:xfrm>
-            <a:off x="4447032" y="4169664"/>
+            <a:off x="4850892" y="4169664"/>
             <a:ext cx="685800" cy="384048"/>
           </a:xfrm>
           <a:prstGeom prst="rect">
@@ -11168,7 +11168,7 @@
         </p:nvSpPr>
         <p:spPr>
           <a:xfrm>
-            <a:off x="5254752" y="4169664"/>
+            <a:off x="5759577" y="4169664"/>
             <a:ext cx="685800" cy="384048"/>
           </a:xfrm>
           <a:prstGeom prst="rect">
@@ -11195,7 +11195,7 @@
         </p:nvSpPr>
         <p:spPr>
           <a:xfrm>
-            <a:off x="5254752" y="4169664"/>
+            <a:off x="5759577" y="4169664"/>
             <a:ext cx="685800" cy="384048"/>
           </a:xfrm>
           <a:prstGeom prst="rect">
@@ -11234,7 +11234,7 @@
         </p:nvSpPr>
         <p:spPr>
           <a:xfrm>
-            <a:off x="6062472" y="4169664"/>
+            <a:off x="6668262" y="4169664"/>
             <a:ext cx="685800" cy="384048"/>
           </a:xfrm>
           <a:prstGeom prst="rect">
@@ -11261,7 +11261,7 @@
         </p:nvSpPr>
         <p:spPr>
           <a:xfrm>
-            <a:off x="6062472" y="4169664"/>
+            <a:off x="6668262" y="4169664"/>
             <a:ext cx="685800" cy="384048"/>
           </a:xfrm>
           <a:prstGeom prst="rect">
@@ -11300,7 +11300,7 @@
         </p:nvSpPr>
         <p:spPr>
           <a:xfrm>
-            <a:off x="6870192" y="4169664"/>
+            <a:off x="7576947" y="4169664"/>
             <a:ext cx="685800" cy="384048"/>
           </a:xfrm>
           <a:prstGeom prst="rect">
@@ -11327,7 +11327,7 @@
         </p:nvSpPr>
         <p:spPr>
           <a:xfrm>
-            <a:off x="6870192" y="4169664"/>
+            <a:off x="7576947" y="4169664"/>
             <a:ext cx="685800" cy="384048"/>
           </a:xfrm>
           <a:prstGeom prst="rect">
@@ -11352,73 +11352,7 @@
                 <a:ea typeface="Trebuchet MS" pitchFamily="34" charset="-122"/>
                 <a:cs typeface="Trebuchet MS" pitchFamily="34" charset="-120"/>
               </a:rPr>
-              <a:t>t</a:t>
-            </a:r>
-            <a:endParaRPr lang="en-US" sz="900" dirty="0"/>
-          </a:p>
-        </p:txBody>
-      </p:sp>
-      <p:sp>
-        <p:nvSpPr>
-          <p:cNvPr id="54" name="Shape 52"/>
-          <p:cNvSpPr/>
-          <p:nvPr/>
-        </p:nvSpPr>
-        <p:spPr>
-          <a:xfrm>
-            <a:off x="7677912" y="4169664"/>
-            <a:ext cx="685800" cy="384048"/>
-          </a:xfrm>
-          <a:prstGeom prst="rect">
-            <a:avLst>
-              <a:gd name="adj" fmla="val 9524"/>
-            </a:avLst>
-          </a:prstGeom>
-          <a:solidFill>
-            <a:srgbClr val="FFFFFF"/>
-          </a:solidFill>
-          <a:ln w="12700">
-            <a:solidFill>
-              <a:srgbClr val="DB2777"/>
-            </a:solidFill>
-            <a:prstDash val="solid"/>
-          </a:ln>
-        </p:spPr>
-      </p:sp>
-      <p:sp>
-        <p:nvSpPr>
-          <p:cNvPr id="55" name="Text 53"/>
-          <p:cNvSpPr/>
-          <p:nvPr/>
-        </p:nvSpPr>
-        <p:spPr>
-          <a:xfrm>
-            <a:off x="7677912" y="4169664"/>
-            <a:ext cx="685800" cy="384048"/>
-          </a:xfrm>
-          <a:prstGeom prst="rect">
-            <a:avLst/>
-          </a:prstGeom>
-          <a:noFill/>
-          <a:ln/>
-        </p:spPr>
-        <p:txBody>
-          <a:bodyPr wrap="square" lIns="0" tIns="0" rIns="0" bIns="0" rtlCol="0" anchor="ctr"/>
-          <a:lstStyle/>
-          <a:p>
-            <a:pPr algn="ctr" indent="0" marL="0">
-              <a:buNone/>
-            </a:pPr>
-            <a:r>
-              <a:rPr lang="en-US" sz="900" b="1" dirty="0">
-                <a:solidFill>
-                  <a:srgbClr val="9D174D"/>
-                </a:solidFill>
-                <a:latin typeface="Trebuchet MS" pitchFamily="34" charset="0"/>
-                <a:ea typeface="Trebuchet MS" pitchFamily="34" charset="-122"/>
-                <a:cs typeface="Trebuchet MS" pitchFamily="34" charset="-120"/>
-              </a:rPr>
-              <a:t>e</a:t>
+              <a:t>te</a:t>
             </a:r>
             <a:endParaRPr lang="en-US" sz="900" dirty="0"/>
           </a:p>
@@ -13005,7 +12939,7 @@
                 <a:ea typeface="Calibri" pitchFamily="34" charset="-122"/>
                 <a:cs typeface="Calibri" pitchFamily="34" charset="-120"/>
               </a:rPr>
-              <a:t>act or result of</a:t>
+              <a:t>act or process of</a:t>
             </a:r>
             <a:endParaRPr lang="en-US" sz="850" dirty="0"/>
           </a:p>
@@ -14029,7 +13963,7 @@
                 <a:ea typeface="Calibri" pitchFamily="34" charset="-122"/>
                 <a:cs typeface="Calibri" pitchFamily="34" charset="-120"/>
               </a:rPr>
-              <a:t>act or result of</a:t>
+              <a:t>act or process of</a:t>
             </a:r>
             <a:endParaRPr lang="en-US" sz="850" dirty="0"/>
           </a:p>
@@ -15660,7 +15594,7 @@
                 <a:ea typeface="Calibri" pitchFamily="34" charset="-122"/>
                 <a:cs typeface="Calibri" pitchFamily="34" charset="-120"/>
               </a:rPr>
-              <a:t>act or result of</a:t>
+              <a:t>act or process of</a:t>
             </a:r>
             <a:endParaRPr lang="en-US" sz="850" dirty="0"/>
           </a:p>
@@ -17636,7 +17570,7 @@
                 <a:ea typeface="Trebuchet MS" pitchFamily="34" charset="-122"/>
                 <a:cs typeface="Trebuchet MS" pitchFamily="34" charset="-120"/>
               </a:rPr>
-              <a:t>2</a:t>
+              <a:t>1</a:t>
             </a:r>
             <a:pPr algn="ctr" indent="0" marL="0">
               <a:buNone/>
@@ -17650,7 +17584,7 @@
                 <a:ea typeface="Trebuchet MS" pitchFamily="34" charset="-122"/>
                 <a:cs typeface="Trebuchet MS" pitchFamily="34" charset="-120"/>
               </a:rPr>
-              <a:t>  punctuation marks</a:t>
+              <a:t>  punctuation mark</a:t>
             </a:r>
             <a:endParaRPr lang="en-US" sz="2800" dirty="0"/>
           </a:p>
@@ -18054,7 +17988,7 @@
                 <a:ea typeface="Calibri" pitchFamily="34" charset="-122"/>
                 <a:cs typeface="Calibri" pitchFamily="34" charset="-120"/>
               </a:rPr>
-              <a:t>Skilled </a:t>
+              <a:t>The </a:t>
             </a:r>
             <a:pPr algn="l" indent="0" marL="0">
               <a:buNone/>
@@ -18071,7 +18005,7 @@
                 <a:ea typeface="Calibri" pitchFamily="34" charset="-122"/>
                 <a:cs typeface="Calibri" pitchFamily="34" charset="-120"/>
               </a:rPr>
-              <a:t>operators</a:t>
+              <a:t>cooperative</a:t>
             </a:r>
             <a:pPr algn="l" indent="0" marL="0">
               <a:buNone/>
@@ -18085,7 +18019,7 @@
                 <a:ea typeface="Calibri" pitchFamily="34" charset="-122"/>
                 <a:cs typeface="Calibri" pitchFamily="34" charset="-120"/>
               </a:rPr>
-              <a:t> must </a:t>
+              <a:t> </a:t>
             </a:r>
             <a:pPr algn="l" indent="0" marL="0">
               <a:buNone/>
@@ -18102,7 +18036,7 @@
                 <a:ea typeface="Calibri" pitchFamily="34" charset="-122"/>
                 <a:cs typeface="Calibri" pitchFamily="34" charset="-120"/>
               </a:rPr>
-              <a:t>cooperate</a:t>
+              <a:t>operator</a:t>
             </a:r>
             <a:pPr algn="l" indent="0" marL="0">
               <a:buNone/>
@@ -18116,7 +18050,7 @@
                 <a:ea typeface="Calibri" pitchFamily="34" charset="-122"/>
                 <a:cs typeface="Calibri" pitchFamily="34" charset="-120"/>
               </a:rPr>
-              <a:t> carefully, because each </a:t>
+              <a:t> was carefully </a:t>
             </a:r>
             <a:pPr algn="l" indent="0" marL="0">
               <a:buNone/>
@@ -18133,7 +18067,7 @@
                 <a:ea typeface="Calibri" pitchFamily="34" charset="-122"/>
                 <a:cs typeface="Calibri" pitchFamily="34" charset="-120"/>
               </a:rPr>
-              <a:t>operation</a:t>
+              <a:t>operating</a:t>
             </a:r>
             <a:pPr algn="l" indent="0" marL="0">
               <a:buNone/>
@@ -18147,7 +18081,7 @@
                 <a:ea typeface="Calibri" pitchFamily="34" charset="-122"/>
                 <a:cs typeface="Calibri" pitchFamily="34" charset="-120"/>
               </a:rPr>
-              <a:t> requires great precision.</a:t>
+              <a:t> the machine, so everyone stayed safe.</a:t>
             </a:r>
             <a:endParaRPr lang="en-US" sz="1800" dirty="0"/>
           </a:p>
@@ -18302,7 +18236,7 @@
                 <a:ea typeface="Trebuchet MS" pitchFamily="34" charset="-122"/>
                 <a:cs typeface="Trebuchet MS" pitchFamily="34" charset="-120"/>
               </a:rPr>
-              <a:t>operators</a:t>
+              <a:t>cooperative</a:t>
             </a:r>
             <a:endParaRPr lang="en-US" sz="1400" dirty="0"/>
           </a:p>
@@ -18430,7 +18364,7 @@
                 <a:ea typeface="Trebuchet MS" pitchFamily="34" charset="-122"/>
                 <a:cs typeface="Trebuchet MS" pitchFamily="34" charset="-120"/>
               </a:rPr>
-              <a:t>cooperate</a:t>
+              <a:t>operator</a:t>
             </a:r>
             <a:endParaRPr lang="en-US" sz="1400" dirty="0"/>
           </a:p>
@@ -18558,7 +18492,7 @@
                 <a:ea typeface="Trebuchet MS" pitchFamily="34" charset="-122"/>
                 <a:cs typeface="Trebuchet MS" pitchFamily="34" charset="-120"/>
               </a:rPr>
-              <a:t>operation</a:t>
+              <a:t>operating</a:t>
             </a:r>
             <a:endParaRPr lang="en-US" sz="1400" dirty="0"/>
           </a:p>
@@ -19028,7 +18962,7 @@
                 <a:ea typeface="Trebuchet MS" pitchFamily="34" charset="-122"/>
                 <a:cs typeface="Trebuchet MS" pitchFamily="34" charset="-120"/>
               </a:rPr>
-              <a:t>operators</a:t>
+              <a:t>cooperative</a:t>
             </a:r>
             <a:endParaRPr lang="en-US" sz="2800" dirty="0"/>
           </a:p>
@@ -19855,7 +19789,7 @@
                 <a:ea typeface="Trebuchet MS" pitchFamily="34" charset="-122"/>
                 <a:cs typeface="Trebuchet MS" pitchFamily="34" charset="-120"/>
               </a:rPr>
-              <a:t>operators</a:t>
+              <a:t>cooperative</a:t>
             </a:r>
             <a:endParaRPr lang="en-US" sz="2800" dirty="0"/>
           </a:p>
@@ -19944,11 +19878,11 @@
             </a:avLst>
           </a:prstGeom>
           <a:solidFill>
-            <a:srgbClr val="CCFBF1"/>
+            <a:srgbClr val="DDD6FE"/>
           </a:solidFill>
           <a:ln w="19050">
             <a:solidFill>
-              <a:srgbClr val="0D9488"/>
+              <a:srgbClr val="7C3AED"/>
             </a:solidFill>
             <a:prstDash val="solid"/>
           </a:ln>
@@ -19988,13 +19922,13 @@
             <a:r>
               <a:rPr lang="en-US" sz="1300" b="1" dirty="0">
                 <a:solidFill>
-                  <a:srgbClr val="0F766E"/>
+                  <a:srgbClr val="4C1D95"/>
                 </a:solidFill>
                 <a:latin typeface="Trebuchet MS" pitchFamily="34" charset="0"/>
                 <a:ea typeface="Trebuchet MS" pitchFamily="34" charset="-122"/>
                 <a:cs typeface="Trebuchet MS" pitchFamily="34" charset="-120"/>
               </a:rPr>
-              <a:t>operate</a:t>
+              <a:t>co</a:t>
             </a:r>
             <a:endParaRPr lang="en-US" sz="1300" dirty="0"/>
           </a:p>
@@ -20033,7 +19967,7 @@
                 <a:ea typeface="Calibri" pitchFamily="34" charset="-122"/>
                 <a:cs typeface="Calibri" pitchFamily="34" charset="-120"/>
               </a:rPr>
-              <a:t>to work or function</a:t>
+              <a:t>together, with</a:t>
             </a:r>
             <a:endParaRPr lang="en-US" sz="850" dirty="0"/>
           </a:p>
@@ -20041,46 +19975,7 @@
       </p:sp>
       <p:sp>
         <p:nvSpPr>
-          <p:cNvPr id="19" name="Text 17"/>
-          <p:cNvSpPr/>
-          <p:nvPr/>
-        </p:nvSpPr>
-        <p:spPr>
-          <a:xfrm>
-            <a:off x="2221992" y="2752344"/>
-            <a:ext cx="1828800" cy="182880"/>
-          </a:xfrm>
-          <a:prstGeom prst="rect">
-            <a:avLst/>
-          </a:prstGeom>
-          <a:noFill/>
-          <a:ln/>
-        </p:spPr>
-        <p:txBody>
-          <a:bodyPr wrap="square" lIns="0" tIns="0" rIns="0" bIns="0" rtlCol="0" anchor="t"/>
-          <a:lstStyle/>
-          <a:p>
-            <a:pPr algn="ctr" indent="0" marL="0">
-              <a:buNone/>
-            </a:pPr>
-            <a:r>
-              <a:rPr lang="en-US" sz="700" i="1" dirty="0">
-                <a:solidFill>
-                  <a:srgbClr val="94A3B8"/>
-                </a:solidFill>
-                <a:latin typeface="Calibri" pitchFamily="34" charset="0"/>
-                <a:ea typeface="Calibri" pitchFamily="34" charset="-122"/>
-                <a:cs typeface="Calibri" pitchFamily="34" charset="-120"/>
-              </a:rPr>
-              <a:t>'e' dropped before vowel suffix</a:t>
-            </a:r>
-            <a:endParaRPr lang="en-US" sz="700" dirty="0"/>
-          </a:p>
-        </p:txBody>
-      </p:sp>
-      <p:sp>
-        <p:nvSpPr>
-          <p:cNvPr id="20" name="Shape 18"/>
+          <p:cNvPr id="19" name="Shape 17"/>
           <p:cNvSpPr/>
           <p:nvPr/>
         </p:nvSpPr>
@@ -20095,11 +19990,11 @@
             </a:avLst>
           </a:prstGeom>
           <a:solidFill>
-            <a:srgbClr val="FCE7F3"/>
+            <a:srgbClr val="CCFBF1"/>
           </a:solidFill>
           <a:ln w="19050">
             <a:solidFill>
-              <a:srgbClr val="DB2777"/>
+              <a:srgbClr val="0D9488"/>
             </a:solidFill>
             <a:prstDash val="solid"/>
           </a:ln>
@@ -20114,7 +20009,7 @@
       </p:sp>
       <p:sp>
         <p:nvSpPr>
-          <p:cNvPr id="21" name="Text 19"/>
+          <p:cNvPr id="20" name="Text 18"/>
           <p:cNvSpPr/>
           <p:nvPr/>
         </p:nvSpPr>
@@ -20139,13 +20034,13 @@
             <a:r>
               <a:rPr lang="en-US" sz="1300" b="1" dirty="0">
                 <a:solidFill>
-                  <a:srgbClr val="9D174D"/>
+                  <a:srgbClr val="0F766E"/>
                 </a:solidFill>
                 <a:latin typeface="Trebuchet MS" pitchFamily="34" charset="0"/>
                 <a:ea typeface="Trebuchet MS" pitchFamily="34" charset="-122"/>
                 <a:cs typeface="Trebuchet MS" pitchFamily="34" charset="-120"/>
               </a:rPr>
-              <a:t>or</a:t>
+              <a:t>operate</a:t>
             </a:r>
             <a:endParaRPr lang="en-US" sz="1300" dirty="0"/>
           </a:p>
@@ -20153,7 +20048,7 @@
       </p:sp>
       <p:sp>
         <p:nvSpPr>
-          <p:cNvPr id="22" name="Text 20"/>
+          <p:cNvPr id="21" name="Text 19"/>
           <p:cNvSpPr/>
           <p:nvPr/>
         </p:nvSpPr>
@@ -20184,9 +20079,48 @@
                 <a:ea typeface="Calibri" pitchFamily="34" charset="-122"/>
                 <a:cs typeface="Calibri" pitchFamily="34" charset="-120"/>
               </a:rPr>
-              <a:t>person who does</a:t>
+              <a:t>to work or function</a:t>
             </a:r>
             <a:endParaRPr lang="en-US" sz="850" dirty="0"/>
+          </a:p>
+        </p:txBody>
+      </p:sp>
+      <p:sp>
+        <p:nvSpPr>
+          <p:cNvPr id="22" name="Text 20"/>
+          <p:cNvSpPr/>
+          <p:nvPr/>
+        </p:nvSpPr>
+        <p:spPr>
+          <a:xfrm>
+            <a:off x="4370832" y="2752344"/>
+            <a:ext cx="1828800" cy="182880"/>
+          </a:xfrm>
+          <a:prstGeom prst="rect">
+            <a:avLst/>
+          </a:prstGeom>
+          <a:noFill/>
+          <a:ln/>
+        </p:spPr>
+        <p:txBody>
+          <a:bodyPr wrap="square" lIns="0" tIns="0" rIns="0" bIns="0" rtlCol="0" anchor="t"/>
+          <a:lstStyle/>
+          <a:p>
+            <a:pPr algn="ctr" indent="0" marL="0">
+              <a:buNone/>
+            </a:pPr>
+            <a:r>
+              <a:rPr lang="en-US" sz="700" i="1" dirty="0">
+                <a:solidFill>
+                  <a:srgbClr val="94A3B8"/>
+                </a:solidFill>
+                <a:latin typeface="Calibri" pitchFamily="34" charset="0"/>
+                <a:ea typeface="Calibri" pitchFamily="34" charset="-122"/>
+                <a:cs typeface="Calibri" pitchFamily="34" charset="-120"/>
+              </a:rPr>
+              <a:t>'e' dropped before vowel suffix</a:t>
+            </a:r>
+            <a:endParaRPr lang="en-US" sz="700" dirty="0"/>
           </a:p>
         </p:txBody>
       </p:sp>
@@ -20257,7 +20191,7 @@
                 <a:ea typeface="Trebuchet MS" pitchFamily="34" charset="-122"/>
                 <a:cs typeface="Trebuchet MS" pitchFamily="34" charset="-120"/>
               </a:rPr>
-              <a:t>s</a:t>
+              <a:t>ive</a:t>
             </a:r>
             <a:endParaRPr lang="en-US" sz="1300" dirty="0"/>
           </a:p>
@@ -20296,7 +20230,7 @@
                 <a:ea typeface="Calibri" pitchFamily="34" charset="-122"/>
                 <a:cs typeface="Calibri" pitchFamily="34" charset="-120"/>
               </a:rPr>
-              <a:t>more than one</a:t>
+              <a:t>having the quality of</a:t>
             </a:r>
             <a:endParaRPr lang="en-US" sz="850" dirty="0"/>
           </a:p>
@@ -20991,7 +20925,7 @@
                 <a:ea typeface="Trebuchet MS" pitchFamily="34" charset="-122"/>
                 <a:cs typeface="Trebuchet MS" pitchFamily="34" charset="-120"/>
               </a:rPr>
-              <a:t>operators</a:t>
+              <a:t>cooperative</a:t>
             </a:r>
             <a:endParaRPr lang="en-US" sz="2800" dirty="0"/>
           </a:p>
@@ -21080,11 +21014,11 @@
             </a:avLst>
           </a:prstGeom>
           <a:solidFill>
-            <a:srgbClr val="CCFBF1"/>
+            <a:srgbClr val="DDD6FE"/>
           </a:solidFill>
           <a:ln w="19050">
             <a:solidFill>
-              <a:srgbClr val="0D9488"/>
+              <a:srgbClr val="7C3AED"/>
             </a:solidFill>
             <a:prstDash val="solid"/>
           </a:ln>
@@ -21124,13 +21058,13 @@
             <a:r>
               <a:rPr lang="en-US" sz="1300" b="1" dirty="0">
                 <a:solidFill>
-                  <a:srgbClr val="0F766E"/>
+                  <a:srgbClr val="4C1D95"/>
                 </a:solidFill>
                 <a:latin typeface="Trebuchet MS" pitchFamily="34" charset="0"/>
                 <a:ea typeface="Trebuchet MS" pitchFamily="34" charset="-122"/>
                 <a:cs typeface="Trebuchet MS" pitchFamily="34" charset="-120"/>
               </a:rPr>
-              <a:t>operate</a:t>
+              <a:t>co</a:t>
             </a:r>
             <a:endParaRPr lang="en-US" sz="1300" dirty="0"/>
           </a:p>
@@ -21169,7 +21103,7 @@
                 <a:ea typeface="Calibri" pitchFamily="34" charset="-122"/>
                 <a:cs typeface="Calibri" pitchFamily="34" charset="-120"/>
               </a:rPr>
-              <a:t>to work or function</a:t>
+              <a:t>together, with</a:t>
             </a:r>
             <a:endParaRPr lang="en-US" sz="850" dirty="0"/>
           </a:p>
@@ -21177,46 +21111,7 @@
       </p:sp>
       <p:sp>
         <p:nvSpPr>
-          <p:cNvPr id="19" name="Text 17"/>
-          <p:cNvSpPr/>
-          <p:nvPr/>
-        </p:nvSpPr>
-        <p:spPr>
-          <a:xfrm>
-            <a:off x="2221992" y="2752344"/>
-            <a:ext cx="1828800" cy="182880"/>
-          </a:xfrm>
-          <a:prstGeom prst="rect">
-            <a:avLst/>
-          </a:prstGeom>
-          <a:noFill/>
-          <a:ln/>
-        </p:spPr>
-        <p:txBody>
-          <a:bodyPr wrap="square" lIns="0" tIns="0" rIns="0" bIns="0" rtlCol="0" anchor="t"/>
-          <a:lstStyle/>
-          <a:p>
-            <a:pPr algn="ctr" indent="0" marL="0">
-              <a:buNone/>
-            </a:pPr>
-            <a:r>
-              <a:rPr lang="en-US" sz="700" i="1" dirty="0">
-                <a:solidFill>
-                  <a:srgbClr val="94A3B8"/>
-                </a:solidFill>
-                <a:latin typeface="Calibri" pitchFamily="34" charset="0"/>
-                <a:ea typeface="Calibri" pitchFamily="34" charset="-122"/>
-                <a:cs typeface="Calibri" pitchFamily="34" charset="-120"/>
-              </a:rPr>
-              <a:t>'e' dropped before vowel suffix</a:t>
-            </a:r>
-            <a:endParaRPr lang="en-US" sz="700" dirty="0"/>
-          </a:p>
-        </p:txBody>
-      </p:sp>
-      <p:sp>
-        <p:nvSpPr>
-          <p:cNvPr id="20" name="Shape 18"/>
+          <p:cNvPr id="19" name="Shape 17"/>
           <p:cNvSpPr/>
           <p:nvPr/>
         </p:nvSpPr>
@@ -21231,11 +21126,11 @@
             </a:avLst>
           </a:prstGeom>
           <a:solidFill>
-            <a:srgbClr val="FCE7F3"/>
+            <a:srgbClr val="CCFBF1"/>
           </a:solidFill>
           <a:ln w="19050">
             <a:solidFill>
-              <a:srgbClr val="DB2777"/>
+              <a:srgbClr val="0D9488"/>
             </a:solidFill>
             <a:prstDash val="solid"/>
           </a:ln>
@@ -21250,7 +21145,7 @@
       </p:sp>
       <p:sp>
         <p:nvSpPr>
-          <p:cNvPr id="21" name="Text 19"/>
+          <p:cNvPr id="20" name="Text 18"/>
           <p:cNvSpPr/>
           <p:nvPr/>
         </p:nvSpPr>
@@ -21275,13 +21170,13 @@
             <a:r>
               <a:rPr lang="en-US" sz="1300" b="1" dirty="0">
                 <a:solidFill>
-                  <a:srgbClr val="9D174D"/>
+                  <a:srgbClr val="0F766E"/>
                 </a:solidFill>
                 <a:latin typeface="Trebuchet MS" pitchFamily="34" charset="0"/>
                 <a:ea typeface="Trebuchet MS" pitchFamily="34" charset="-122"/>
                 <a:cs typeface="Trebuchet MS" pitchFamily="34" charset="-120"/>
               </a:rPr>
-              <a:t>or</a:t>
+              <a:t>operate</a:t>
             </a:r>
             <a:endParaRPr lang="en-US" sz="1300" dirty="0"/>
           </a:p>
@@ -21289,7 +21184,7 @@
       </p:sp>
       <p:sp>
         <p:nvSpPr>
-          <p:cNvPr id="22" name="Text 20"/>
+          <p:cNvPr id="21" name="Text 19"/>
           <p:cNvSpPr/>
           <p:nvPr/>
         </p:nvSpPr>
@@ -21320,9 +21215,48 @@
                 <a:ea typeface="Calibri" pitchFamily="34" charset="-122"/>
                 <a:cs typeface="Calibri" pitchFamily="34" charset="-120"/>
               </a:rPr>
-              <a:t>person who does</a:t>
+              <a:t>to work or function</a:t>
             </a:r>
             <a:endParaRPr lang="en-US" sz="850" dirty="0"/>
+          </a:p>
+        </p:txBody>
+      </p:sp>
+      <p:sp>
+        <p:nvSpPr>
+          <p:cNvPr id="22" name="Text 20"/>
+          <p:cNvSpPr/>
+          <p:nvPr/>
+        </p:nvSpPr>
+        <p:spPr>
+          <a:xfrm>
+            <a:off x="4370832" y="2752344"/>
+            <a:ext cx="1828800" cy="182880"/>
+          </a:xfrm>
+          <a:prstGeom prst="rect">
+            <a:avLst/>
+          </a:prstGeom>
+          <a:noFill/>
+          <a:ln/>
+        </p:spPr>
+        <p:txBody>
+          <a:bodyPr wrap="square" lIns="0" tIns="0" rIns="0" bIns="0" rtlCol="0" anchor="t"/>
+          <a:lstStyle/>
+          <a:p>
+            <a:pPr algn="ctr" indent="0" marL="0">
+              <a:buNone/>
+            </a:pPr>
+            <a:r>
+              <a:rPr lang="en-US" sz="700" i="1" dirty="0">
+                <a:solidFill>
+                  <a:srgbClr val="94A3B8"/>
+                </a:solidFill>
+                <a:latin typeface="Calibri" pitchFamily="34" charset="0"/>
+                <a:ea typeface="Calibri" pitchFamily="34" charset="-122"/>
+                <a:cs typeface="Calibri" pitchFamily="34" charset="-120"/>
+              </a:rPr>
+              <a:t>'e' dropped before vowel suffix</a:t>
+            </a:r>
+            <a:endParaRPr lang="en-US" sz="700" dirty="0"/>
           </a:p>
         </p:txBody>
       </p:sp>
@@ -21393,7 +21327,7 @@
                 <a:ea typeface="Trebuchet MS" pitchFamily="34" charset="-122"/>
                 <a:cs typeface="Trebuchet MS" pitchFamily="34" charset="-120"/>
               </a:rPr>
-              <a:t>s</a:t>
+              <a:t>ive</a:t>
             </a:r>
             <a:endParaRPr lang="en-US" sz="1300" dirty="0"/>
           </a:p>
@@ -21432,7 +21366,7 @@
                 <a:ea typeface="Calibri" pitchFamily="34" charset="-122"/>
                 <a:cs typeface="Calibri" pitchFamily="34" charset="-120"/>
               </a:rPr>
-              <a:t>more than one</a:t>
+              <a:t>having the quality of</a:t>
             </a:r>
             <a:endParaRPr lang="en-US" sz="850" dirty="0"/>
           </a:p>
@@ -21539,8 +21473,8 @@
         </p:nvSpPr>
         <p:spPr>
           <a:xfrm>
-            <a:off x="1975104" y="3364992"/>
-            <a:ext cx="1554480" cy="475488"/>
+            <a:off x="1978152" y="3364992"/>
+            <a:ext cx="1225296" cy="475488"/>
           </a:xfrm>
           <a:prstGeom prst="rect">
             <a:avLst>
@@ -21566,8 +21500,8 @@
         </p:nvSpPr>
         <p:spPr>
           <a:xfrm>
-            <a:off x="1975104" y="3364992"/>
-            <a:ext cx="1554480" cy="475488"/>
+            <a:off x="1978152" y="3364992"/>
+            <a:ext cx="1225296" cy="475488"/>
           </a:xfrm>
           <a:prstGeom prst="rect">
             <a:avLst/>
@@ -21591,7 +21525,7 @@
                 <a:ea typeface="Trebuchet MS" pitchFamily="34" charset="-122"/>
                 <a:cs typeface="Trebuchet MS" pitchFamily="34" charset="-120"/>
               </a:rPr>
-              <a:t>op</a:t>
+              <a:t>co</a:t>
             </a:r>
             <a:endParaRPr lang="en-US" sz="1400" dirty="0"/>
           </a:p>
@@ -21605,8 +21539,8 @@
         </p:nvSpPr>
         <p:spPr>
           <a:xfrm>
-            <a:off x="3529584" y="3364992"/>
-            <a:ext cx="73152" cy="475488"/>
+            <a:off x="3203448" y="3364992"/>
+            <a:ext cx="76200" cy="475488"/>
           </a:xfrm>
           <a:prstGeom prst="rect">
             <a:avLst/>
@@ -21644,8 +21578,8 @@
         </p:nvSpPr>
         <p:spPr>
           <a:xfrm>
-            <a:off x="3602736" y="3364992"/>
-            <a:ext cx="1554480" cy="475488"/>
+            <a:off x="3279648" y="3364992"/>
+            <a:ext cx="1225296" cy="475488"/>
           </a:xfrm>
           <a:prstGeom prst="rect">
             <a:avLst>
@@ -21671,8 +21605,8 @@
         </p:nvSpPr>
         <p:spPr>
           <a:xfrm>
-            <a:off x="3602736" y="3364992"/>
-            <a:ext cx="1554480" cy="475488"/>
+            <a:off x="3279648" y="3364992"/>
+            <a:ext cx="1225296" cy="475488"/>
           </a:xfrm>
           <a:prstGeom prst="rect">
             <a:avLst/>
@@ -21696,7 +21630,7 @@
                 <a:ea typeface="Trebuchet MS" pitchFamily="34" charset="-122"/>
                 <a:cs typeface="Trebuchet MS" pitchFamily="34" charset="-120"/>
               </a:rPr>
-              <a:t>er</a:t>
+              <a:t>op</a:t>
             </a:r>
             <a:endParaRPr lang="en-US" sz="1400" dirty="0"/>
           </a:p>
@@ -21710,8 +21644,8 @@
         </p:nvSpPr>
         <p:spPr>
           <a:xfrm>
-            <a:off x="5157216" y="3364992"/>
-            <a:ext cx="73152" cy="475488"/>
+            <a:off x="4504944" y="3364992"/>
+            <a:ext cx="76200" cy="475488"/>
           </a:xfrm>
           <a:prstGeom prst="rect">
             <a:avLst/>
@@ -21749,8 +21683,8 @@
         </p:nvSpPr>
         <p:spPr>
           <a:xfrm>
-            <a:off x="5230368" y="3364992"/>
-            <a:ext cx="1554480" cy="475488"/>
+            <a:off x="4581144" y="3364992"/>
+            <a:ext cx="1225296" cy="475488"/>
           </a:xfrm>
           <a:prstGeom prst="rect">
             <a:avLst>
@@ -21776,8 +21710,8 @@
         </p:nvSpPr>
         <p:spPr>
           <a:xfrm>
-            <a:off x="5230368" y="3364992"/>
-            <a:ext cx="1554480" cy="475488"/>
+            <a:off x="4581144" y="3364992"/>
+            <a:ext cx="1225296" cy="475488"/>
           </a:xfrm>
           <a:prstGeom prst="rect">
             <a:avLst/>
@@ -21801,7 +21735,7 @@
                 <a:ea typeface="Trebuchet MS" pitchFamily="34" charset="-122"/>
                 <a:cs typeface="Trebuchet MS" pitchFamily="34" charset="-120"/>
               </a:rPr>
-              <a:t>a</a:t>
+              <a:t>er</a:t>
             </a:r>
             <a:endParaRPr lang="en-US" sz="1400" dirty="0"/>
           </a:p>
@@ -21815,8 +21749,8 @@
         </p:nvSpPr>
         <p:spPr>
           <a:xfrm>
-            <a:off x="6784848" y="3364992"/>
-            <a:ext cx="73152" cy="475488"/>
+            <a:off x="5806440" y="3364992"/>
+            <a:ext cx="76200" cy="475488"/>
           </a:xfrm>
           <a:prstGeom prst="rect">
             <a:avLst/>
@@ -21854,8 +21788,8 @@
         </p:nvSpPr>
         <p:spPr>
           <a:xfrm>
-            <a:off x="6858000" y="3364992"/>
-            <a:ext cx="1554480" cy="475488"/>
+            <a:off x="5882640" y="3364992"/>
+            <a:ext cx="1225296" cy="475488"/>
           </a:xfrm>
           <a:prstGeom prst="rect">
             <a:avLst>
@@ -21881,8 +21815,8 @@
         </p:nvSpPr>
         <p:spPr>
           <a:xfrm>
-            <a:off x="6858000" y="3364992"/>
-            <a:ext cx="1554480" cy="475488"/>
+            <a:off x="5882640" y="3364992"/>
+            <a:ext cx="1225296" cy="475488"/>
           </a:xfrm>
           <a:prstGeom prst="rect">
             <a:avLst/>
@@ -21906,7 +21840,7 @@
                 <a:ea typeface="Trebuchet MS" pitchFamily="34" charset="-122"/>
                 <a:cs typeface="Trebuchet MS" pitchFamily="34" charset="-120"/>
               </a:rPr>
-              <a:t>tors</a:t>
+              <a:t>a</a:t>
             </a:r>
             <a:endParaRPr lang="en-US" sz="1400" dirty="0"/>
           </a:p>
@@ -21914,7 +21848,112 @@
       </p:sp>
       <p:sp>
         <p:nvSpPr>
-          <p:cNvPr id="40" name="Shape 38"/>
+          <p:cNvPr id="40" name="Text 38"/>
+          <p:cNvSpPr/>
+          <p:nvPr/>
+        </p:nvSpPr>
+        <p:spPr>
+          <a:xfrm>
+            <a:off x="7107936" y="3364992"/>
+            <a:ext cx="76200" cy="475488"/>
+          </a:xfrm>
+          <a:prstGeom prst="rect">
+            <a:avLst/>
+          </a:prstGeom>
+          <a:noFill/>
+          <a:ln/>
+        </p:spPr>
+        <p:txBody>
+          <a:bodyPr wrap="square" lIns="0" tIns="0" rIns="0" bIns="0" rtlCol="0" anchor="ctr"/>
+          <a:lstStyle/>
+          <a:p>
+            <a:pPr algn="ctr" indent="0" marL="0">
+              <a:buNone/>
+            </a:pPr>
+            <a:r>
+              <a:rPr lang="en-US" sz="1600" b="1" dirty="0">
+                <a:solidFill>
+                  <a:srgbClr val="0D9488"/>
+                </a:solidFill>
+                <a:latin typeface="Trebuchet MS" pitchFamily="34" charset="0"/>
+                <a:ea typeface="Trebuchet MS" pitchFamily="34" charset="-122"/>
+                <a:cs typeface="Trebuchet MS" pitchFamily="34" charset="-120"/>
+              </a:rPr>
+              <a:t>·</a:t>
+            </a:r>
+            <a:endParaRPr lang="en-US" sz="1600" dirty="0"/>
+          </a:p>
+        </p:txBody>
+      </p:sp>
+      <p:sp>
+        <p:nvSpPr>
+          <p:cNvPr id="41" name="Shape 39"/>
+          <p:cNvSpPr/>
+          <p:nvPr/>
+        </p:nvSpPr>
+        <p:spPr>
+          <a:xfrm>
+            <a:off x="7184136" y="3364992"/>
+            <a:ext cx="1225296" cy="475488"/>
+          </a:xfrm>
+          <a:prstGeom prst="rect">
+            <a:avLst>
+              <a:gd name="adj" fmla="val 9615"/>
+            </a:avLst>
+          </a:prstGeom>
+          <a:solidFill>
+            <a:srgbClr val="FFFFFF"/>
+          </a:solidFill>
+          <a:ln w="12700">
+            <a:solidFill>
+              <a:srgbClr val="0D9488"/>
+            </a:solidFill>
+            <a:prstDash val="solid"/>
+          </a:ln>
+        </p:spPr>
+      </p:sp>
+      <p:sp>
+        <p:nvSpPr>
+          <p:cNvPr id="42" name="Text 40"/>
+          <p:cNvSpPr/>
+          <p:nvPr/>
+        </p:nvSpPr>
+        <p:spPr>
+          <a:xfrm>
+            <a:off x="7184136" y="3364992"/>
+            <a:ext cx="1225296" cy="475488"/>
+          </a:xfrm>
+          <a:prstGeom prst="rect">
+            <a:avLst/>
+          </a:prstGeom>
+          <a:noFill/>
+          <a:ln/>
+        </p:spPr>
+        <p:txBody>
+          <a:bodyPr wrap="square" lIns="0" tIns="0" rIns="0" bIns="0" rtlCol="0" anchor="ctr"/>
+          <a:lstStyle/>
+          <a:p>
+            <a:pPr algn="ctr" indent="0" marL="0">
+              <a:buNone/>
+            </a:pPr>
+            <a:r>
+              <a:rPr lang="en-US" sz="1400" b="1" dirty="0">
+                <a:solidFill>
+                  <a:srgbClr val="0D9488"/>
+                </a:solidFill>
+                <a:latin typeface="Trebuchet MS" pitchFamily="34" charset="0"/>
+                <a:ea typeface="Trebuchet MS" pitchFamily="34" charset="-122"/>
+                <a:cs typeface="Trebuchet MS" pitchFamily="34" charset="-120"/>
+              </a:rPr>
+              <a:t>tive</a:t>
+            </a:r>
+            <a:endParaRPr lang="en-US" sz="1400" dirty="0"/>
+          </a:p>
+        </p:txBody>
+      </p:sp>
+      <p:sp>
+        <p:nvSpPr>
+          <p:cNvPr id="43" name="Shape 41"/>
           <p:cNvSpPr/>
           <p:nvPr/>
         </p:nvSpPr>
@@ -21941,7 +21980,7 @@
       </p:sp>
       <p:sp>
         <p:nvSpPr>
-          <p:cNvPr id="41" name="Text 39"/>
+          <p:cNvPr id="44" name="Text 42"/>
           <p:cNvSpPr/>
           <p:nvPr/>
         </p:nvSpPr>
@@ -21980,7 +22019,7 @@
       </p:sp>
       <p:sp>
         <p:nvSpPr>
-          <p:cNvPr id="42" name="Shape 40"/>
+          <p:cNvPr id="45" name="Shape 43"/>
           <p:cNvSpPr/>
           <p:nvPr/>
         </p:nvSpPr>
@@ -22007,7 +22046,7 @@
       </p:sp>
       <p:sp>
         <p:nvSpPr>
-          <p:cNvPr id="43" name="Text 41"/>
+          <p:cNvPr id="46" name="Text 44"/>
           <p:cNvSpPr/>
           <p:nvPr/>
         </p:nvSpPr>
@@ -22469,7 +22508,7 @@
                 <a:ea typeface="Trebuchet MS" pitchFamily="34" charset="-122"/>
                 <a:cs typeface="Trebuchet MS" pitchFamily="34" charset="-120"/>
               </a:rPr>
-              <a:t>operators</a:t>
+              <a:t>cooperative</a:t>
             </a:r>
             <a:endParaRPr lang="en-US" sz="2800" dirty="0"/>
           </a:p>
@@ -22558,11 +22597,11 @@
             </a:avLst>
           </a:prstGeom>
           <a:solidFill>
-            <a:srgbClr val="CCFBF1"/>
+            <a:srgbClr val="DDD6FE"/>
           </a:solidFill>
           <a:ln w="19050">
             <a:solidFill>
-              <a:srgbClr val="0D9488"/>
+              <a:srgbClr val="7C3AED"/>
             </a:solidFill>
             <a:prstDash val="solid"/>
           </a:ln>
@@ -22602,13 +22641,13 @@
             <a:r>
               <a:rPr lang="en-US" sz="1300" b="1" dirty="0">
                 <a:solidFill>
-                  <a:srgbClr val="0F766E"/>
+                  <a:srgbClr val="4C1D95"/>
                 </a:solidFill>
                 <a:latin typeface="Trebuchet MS" pitchFamily="34" charset="0"/>
                 <a:ea typeface="Trebuchet MS" pitchFamily="34" charset="-122"/>
                 <a:cs typeface="Trebuchet MS" pitchFamily="34" charset="-120"/>
               </a:rPr>
-              <a:t>operate</a:t>
+              <a:t>co</a:t>
             </a:r>
             <a:endParaRPr lang="en-US" sz="1300" dirty="0"/>
           </a:p>
@@ -22647,7 +22686,7 @@
                 <a:ea typeface="Calibri" pitchFamily="34" charset="-122"/>
                 <a:cs typeface="Calibri" pitchFamily="34" charset="-120"/>
               </a:rPr>
-              <a:t>to work or function</a:t>
+              <a:t>together, with</a:t>
             </a:r>
             <a:endParaRPr lang="en-US" sz="850" dirty="0"/>
           </a:p>
@@ -22655,46 +22694,7 @@
       </p:sp>
       <p:sp>
         <p:nvSpPr>
-          <p:cNvPr id="19" name="Text 17"/>
-          <p:cNvSpPr/>
-          <p:nvPr/>
-        </p:nvSpPr>
-        <p:spPr>
-          <a:xfrm>
-            <a:off x="2221992" y="2752344"/>
-            <a:ext cx="1828800" cy="182880"/>
-          </a:xfrm>
-          <a:prstGeom prst="rect">
-            <a:avLst/>
-          </a:prstGeom>
-          <a:noFill/>
-          <a:ln/>
-        </p:spPr>
-        <p:txBody>
-          <a:bodyPr wrap="square" lIns="0" tIns="0" rIns="0" bIns="0" rtlCol="0" anchor="t"/>
-          <a:lstStyle/>
-          <a:p>
-            <a:pPr algn="ctr" indent="0" marL="0">
-              <a:buNone/>
-            </a:pPr>
-            <a:r>
-              <a:rPr lang="en-US" sz="700" i="1" dirty="0">
-                <a:solidFill>
-                  <a:srgbClr val="94A3B8"/>
-                </a:solidFill>
-                <a:latin typeface="Calibri" pitchFamily="34" charset="0"/>
-                <a:ea typeface="Calibri" pitchFamily="34" charset="-122"/>
-                <a:cs typeface="Calibri" pitchFamily="34" charset="-120"/>
-              </a:rPr>
-              <a:t>'e' dropped before vowel suffix</a:t>
-            </a:r>
-            <a:endParaRPr lang="en-US" sz="700" dirty="0"/>
-          </a:p>
-        </p:txBody>
-      </p:sp>
-      <p:sp>
-        <p:nvSpPr>
-          <p:cNvPr id="20" name="Shape 18"/>
+          <p:cNvPr id="19" name="Shape 17"/>
           <p:cNvSpPr/>
           <p:nvPr/>
         </p:nvSpPr>
@@ -22709,11 +22709,11 @@
             </a:avLst>
           </a:prstGeom>
           <a:solidFill>
-            <a:srgbClr val="FCE7F3"/>
+            <a:srgbClr val="CCFBF1"/>
           </a:solidFill>
           <a:ln w="19050">
             <a:solidFill>
-              <a:srgbClr val="DB2777"/>
+              <a:srgbClr val="0D9488"/>
             </a:solidFill>
             <a:prstDash val="solid"/>
           </a:ln>
@@ -22728,7 +22728,7 @@
       </p:sp>
       <p:sp>
         <p:nvSpPr>
-          <p:cNvPr id="21" name="Text 19"/>
+          <p:cNvPr id="20" name="Text 18"/>
           <p:cNvSpPr/>
           <p:nvPr/>
         </p:nvSpPr>
@@ -22753,13 +22753,13 @@
             <a:r>
               <a:rPr lang="en-US" sz="1300" b="1" dirty="0">
                 <a:solidFill>
-                  <a:srgbClr val="9D174D"/>
+                  <a:srgbClr val="0F766E"/>
                 </a:solidFill>
                 <a:latin typeface="Trebuchet MS" pitchFamily="34" charset="0"/>
                 <a:ea typeface="Trebuchet MS" pitchFamily="34" charset="-122"/>
                 <a:cs typeface="Trebuchet MS" pitchFamily="34" charset="-120"/>
               </a:rPr>
-              <a:t>or</a:t>
+              <a:t>operate</a:t>
             </a:r>
             <a:endParaRPr lang="en-US" sz="1300" dirty="0"/>
           </a:p>
@@ -22767,7 +22767,7 @@
       </p:sp>
       <p:sp>
         <p:nvSpPr>
-          <p:cNvPr id="22" name="Text 20"/>
+          <p:cNvPr id="21" name="Text 19"/>
           <p:cNvSpPr/>
           <p:nvPr/>
         </p:nvSpPr>
@@ -22798,9 +22798,48 @@
                 <a:ea typeface="Calibri" pitchFamily="34" charset="-122"/>
                 <a:cs typeface="Calibri" pitchFamily="34" charset="-120"/>
               </a:rPr>
-              <a:t>person who does</a:t>
+              <a:t>to work or function</a:t>
             </a:r>
             <a:endParaRPr lang="en-US" sz="850" dirty="0"/>
+          </a:p>
+        </p:txBody>
+      </p:sp>
+      <p:sp>
+        <p:nvSpPr>
+          <p:cNvPr id="22" name="Text 20"/>
+          <p:cNvSpPr/>
+          <p:nvPr/>
+        </p:nvSpPr>
+        <p:spPr>
+          <a:xfrm>
+            <a:off x="4370832" y="2752344"/>
+            <a:ext cx="1828800" cy="182880"/>
+          </a:xfrm>
+          <a:prstGeom prst="rect">
+            <a:avLst/>
+          </a:prstGeom>
+          <a:noFill/>
+          <a:ln/>
+        </p:spPr>
+        <p:txBody>
+          <a:bodyPr wrap="square" lIns="0" tIns="0" rIns="0" bIns="0" rtlCol="0" anchor="t"/>
+          <a:lstStyle/>
+          <a:p>
+            <a:pPr algn="ctr" indent="0" marL="0">
+              <a:buNone/>
+            </a:pPr>
+            <a:r>
+              <a:rPr lang="en-US" sz="700" i="1" dirty="0">
+                <a:solidFill>
+                  <a:srgbClr val="94A3B8"/>
+                </a:solidFill>
+                <a:latin typeface="Calibri" pitchFamily="34" charset="0"/>
+                <a:ea typeface="Calibri" pitchFamily="34" charset="-122"/>
+                <a:cs typeface="Calibri" pitchFamily="34" charset="-120"/>
+              </a:rPr>
+              <a:t>'e' dropped before vowel suffix</a:t>
+            </a:r>
+            <a:endParaRPr lang="en-US" sz="700" dirty="0"/>
           </a:p>
         </p:txBody>
       </p:sp>
@@ -22871,7 +22910,7 @@
                 <a:ea typeface="Trebuchet MS" pitchFamily="34" charset="-122"/>
                 <a:cs typeface="Trebuchet MS" pitchFamily="34" charset="-120"/>
               </a:rPr>
-              <a:t>s</a:t>
+              <a:t>ive</a:t>
             </a:r>
             <a:endParaRPr lang="en-US" sz="1300" dirty="0"/>
           </a:p>
@@ -22910,7 +22949,7 @@
                 <a:ea typeface="Calibri" pitchFamily="34" charset="-122"/>
                 <a:cs typeface="Calibri" pitchFamily="34" charset="-120"/>
               </a:rPr>
-              <a:t>more than one</a:t>
+              <a:t>having the quality of</a:t>
             </a:r>
             <a:endParaRPr lang="en-US" sz="850" dirty="0"/>
           </a:p>
@@ -23017,8 +23056,8 @@
         </p:nvSpPr>
         <p:spPr>
           <a:xfrm>
-            <a:off x="1975104" y="3364992"/>
-            <a:ext cx="1554480" cy="475488"/>
+            <a:off x="1978152" y="3364992"/>
+            <a:ext cx="1225296" cy="475488"/>
           </a:xfrm>
           <a:prstGeom prst="rect">
             <a:avLst>
@@ -23044,8 +23083,8 @@
         </p:nvSpPr>
         <p:spPr>
           <a:xfrm>
-            <a:off x="1975104" y="3364992"/>
-            <a:ext cx="1554480" cy="475488"/>
+            <a:off x="1978152" y="3364992"/>
+            <a:ext cx="1225296" cy="475488"/>
           </a:xfrm>
           <a:prstGeom prst="rect">
             <a:avLst/>
@@ -23069,7 +23108,7 @@
                 <a:ea typeface="Trebuchet MS" pitchFamily="34" charset="-122"/>
                 <a:cs typeface="Trebuchet MS" pitchFamily="34" charset="-120"/>
               </a:rPr>
-              <a:t>op</a:t>
+              <a:t>co</a:t>
             </a:r>
             <a:endParaRPr lang="en-US" sz="1400" dirty="0"/>
           </a:p>
@@ -23083,8 +23122,8 @@
         </p:nvSpPr>
         <p:spPr>
           <a:xfrm>
-            <a:off x="3529584" y="3364992"/>
-            <a:ext cx="73152" cy="475488"/>
+            <a:off x="3203448" y="3364992"/>
+            <a:ext cx="76200" cy="475488"/>
           </a:xfrm>
           <a:prstGeom prst="rect">
             <a:avLst/>
@@ -23122,8 +23161,8 @@
         </p:nvSpPr>
         <p:spPr>
           <a:xfrm>
-            <a:off x="3602736" y="3364992"/>
-            <a:ext cx="1554480" cy="475488"/>
+            <a:off x="3279648" y="3364992"/>
+            <a:ext cx="1225296" cy="475488"/>
           </a:xfrm>
           <a:prstGeom prst="rect">
             <a:avLst>
@@ -23149,8 +23188,8 @@
         </p:nvSpPr>
         <p:spPr>
           <a:xfrm>
-            <a:off x="3602736" y="3364992"/>
-            <a:ext cx="1554480" cy="475488"/>
+            <a:off x="3279648" y="3364992"/>
+            <a:ext cx="1225296" cy="475488"/>
           </a:xfrm>
           <a:prstGeom prst="rect">
             <a:avLst/>
@@ -23174,7 +23213,7 @@
                 <a:ea typeface="Trebuchet MS" pitchFamily="34" charset="-122"/>
                 <a:cs typeface="Trebuchet MS" pitchFamily="34" charset="-120"/>
               </a:rPr>
-              <a:t>er</a:t>
+              <a:t>op</a:t>
             </a:r>
             <a:endParaRPr lang="en-US" sz="1400" dirty="0"/>
           </a:p>
@@ -23188,8 +23227,8 @@
         </p:nvSpPr>
         <p:spPr>
           <a:xfrm>
-            <a:off x="5157216" y="3364992"/>
-            <a:ext cx="73152" cy="475488"/>
+            <a:off x="4504944" y="3364992"/>
+            <a:ext cx="76200" cy="475488"/>
           </a:xfrm>
           <a:prstGeom prst="rect">
             <a:avLst/>
@@ -23227,8 +23266,8 @@
         </p:nvSpPr>
         <p:spPr>
           <a:xfrm>
-            <a:off x="5230368" y="3364992"/>
-            <a:ext cx="1554480" cy="475488"/>
+            <a:off x="4581144" y="3364992"/>
+            <a:ext cx="1225296" cy="475488"/>
           </a:xfrm>
           <a:prstGeom prst="rect">
             <a:avLst>
@@ -23254,8 +23293,8 @@
         </p:nvSpPr>
         <p:spPr>
           <a:xfrm>
-            <a:off x="5230368" y="3364992"/>
-            <a:ext cx="1554480" cy="475488"/>
+            <a:off x="4581144" y="3364992"/>
+            <a:ext cx="1225296" cy="475488"/>
           </a:xfrm>
           <a:prstGeom prst="rect">
             <a:avLst/>
@@ -23279,7 +23318,7 @@
                 <a:ea typeface="Trebuchet MS" pitchFamily="34" charset="-122"/>
                 <a:cs typeface="Trebuchet MS" pitchFamily="34" charset="-120"/>
               </a:rPr>
-              <a:t>a</a:t>
+              <a:t>er</a:t>
             </a:r>
             <a:endParaRPr lang="en-US" sz="1400" dirty="0"/>
           </a:p>
@@ -23293,8 +23332,8 @@
         </p:nvSpPr>
         <p:spPr>
           <a:xfrm>
-            <a:off x="6784848" y="3364992"/>
-            <a:ext cx="73152" cy="475488"/>
+            <a:off x="5806440" y="3364992"/>
+            <a:ext cx="76200" cy="475488"/>
           </a:xfrm>
           <a:prstGeom prst="rect">
             <a:avLst/>
@@ -23332,8 +23371,8 @@
         </p:nvSpPr>
         <p:spPr>
           <a:xfrm>
-            <a:off x="6858000" y="3364992"/>
-            <a:ext cx="1554480" cy="475488"/>
+            <a:off x="5882640" y="3364992"/>
+            <a:ext cx="1225296" cy="475488"/>
           </a:xfrm>
           <a:prstGeom prst="rect">
             <a:avLst>
@@ -23359,8 +23398,8 @@
         </p:nvSpPr>
         <p:spPr>
           <a:xfrm>
-            <a:off x="6858000" y="3364992"/>
-            <a:ext cx="1554480" cy="475488"/>
+            <a:off x="5882640" y="3364992"/>
+            <a:ext cx="1225296" cy="475488"/>
           </a:xfrm>
           <a:prstGeom prst="rect">
             <a:avLst/>
@@ -23384,7 +23423,7 @@
                 <a:ea typeface="Trebuchet MS" pitchFamily="34" charset="-122"/>
                 <a:cs typeface="Trebuchet MS" pitchFamily="34" charset="-120"/>
               </a:rPr>
-              <a:t>tors</a:t>
+              <a:t>a</a:t>
             </a:r>
             <a:endParaRPr lang="en-US" sz="1400" dirty="0"/>
           </a:p>
@@ -23392,7 +23431,112 @@
       </p:sp>
       <p:sp>
         <p:nvSpPr>
-          <p:cNvPr id="40" name="Shape 38"/>
+          <p:cNvPr id="40" name="Text 38"/>
+          <p:cNvSpPr/>
+          <p:nvPr/>
+        </p:nvSpPr>
+        <p:spPr>
+          <a:xfrm>
+            <a:off x="7107936" y="3364992"/>
+            <a:ext cx="76200" cy="475488"/>
+          </a:xfrm>
+          <a:prstGeom prst="rect">
+            <a:avLst/>
+          </a:prstGeom>
+          <a:noFill/>
+          <a:ln/>
+        </p:spPr>
+        <p:txBody>
+          <a:bodyPr wrap="square" lIns="0" tIns="0" rIns="0" bIns="0" rtlCol="0" anchor="ctr"/>
+          <a:lstStyle/>
+          <a:p>
+            <a:pPr algn="ctr" indent="0" marL="0">
+              <a:buNone/>
+            </a:pPr>
+            <a:r>
+              <a:rPr lang="en-US" sz="1600" b="1" dirty="0">
+                <a:solidFill>
+                  <a:srgbClr val="0D9488"/>
+                </a:solidFill>
+                <a:latin typeface="Trebuchet MS" pitchFamily="34" charset="0"/>
+                <a:ea typeface="Trebuchet MS" pitchFamily="34" charset="-122"/>
+                <a:cs typeface="Trebuchet MS" pitchFamily="34" charset="-120"/>
+              </a:rPr>
+              <a:t>·</a:t>
+            </a:r>
+            <a:endParaRPr lang="en-US" sz="1600" dirty="0"/>
+          </a:p>
+        </p:txBody>
+      </p:sp>
+      <p:sp>
+        <p:nvSpPr>
+          <p:cNvPr id="41" name="Shape 39"/>
+          <p:cNvSpPr/>
+          <p:nvPr/>
+        </p:nvSpPr>
+        <p:spPr>
+          <a:xfrm>
+            <a:off x="7184136" y="3364992"/>
+            <a:ext cx="1225296" cy="475488"/>
+          </a:xfrm>
+          <a:prstGeom prst="rect">
+            <a:avLst>
+              <a:gd name="adj" fmla="val 9615"/>
+            </a:avLst>
+          </a:prstGeom>
+          <a:solidFill>
+            <a:srgbClr val="FFFFFF"/>
+          </a:solidFill>
+          <a:ln w="12700">
+            <a:solidFill>
+              <a:srgbClr val="0D9488"/>
+            </a:solidFill>
+            <a:prstDash val="solid"/>
+          </a:ln>
+        </p:spPr>
+      </p:sp>
+      <p:sp>
+        <p:nvSpPr>
+          <p:cNvPr id="42" name="Text 40"/>
+          <p:cNvSpPr/>
+          <p:nvPr/>
+        </p:nvSpPr>
+        <p:spPr>
+          <a:xfrm>
+            <a:off x="7184136" y="3364992"/>
+            <a:ext cx="1225296" cy="475488"/>
+          </a:xfrm>
+          <a:prstGeom prst="rect">
+            <a:avLst/>
+          </a:prstGeom>
+          <a:noFill/>
+          <a:ln/>
+        </p:spPr>
+        <p:txBody>
+          <a:bodyPr wrap="square" lIns="0" tIns="0" rIns="0" bIns="0" rtlCol="0" anchor="ctr"/>
+          <a:lstStyle/>
+          <a:p>
+            <a:pPr algn="ctr" indent="0" marL="0">
+              <a:buNone/>
+            </a:pPr>
+            <a:r>
+              <a:rPr lang="en-US" sz="1400" b="1" dirty="0">
+                <a:solidFill>
+                  <a:srgbClr val="0D9488"/>
+                </a:solidFill>
+                <a:latin typeface="Trebuchet MS" pitchFamily="34" charset="0"/>
+                <a:ea typeface="Trebuchet MS" pitchFamily="34" charset="-122"/>
+                <a:cs typeface="Trebuchet MS" pitchFamily="34" charset="-120"/>
+              </a:rPr>
+              <a:t>tive</a:t>
+            </a:r>
+            <a:endParaRPr lang="en-US" sz="1400" dirty="0"/>
+          </a:p>
+        </p:txBody>
+      </p:sp>
+      <p:sp>
+        <p:nvSpPr>
+          <p:cNvPr id="43" name="Shape 41"/>
           <p:cNvSpPr/>
           <p:nvPr/>
         </p:nvSpPr>
@@ -23419,7 +23563,7 @@
       </p:sp>
       <p:sp>
         <p:nvSpPr>
-          <p:cNvPr id="41" name="Text 39"/>
+          <p:cNvPr id="44" name="Text 42"/>
           <p:cNvSpPr/>
           <p:nvPr/>
         </p:nvSpPr>
@@ -23458,18 +23602,18 @@
       </p:sp>
       <p:sp>
         <p:nvSpPr>
-          <p:cNvPr id="42" name="Shape 40"/>
+          <p:cNvPr id="45" name="Shape 43"/>
           <p:cNvSpPr/>
           <p:nvPr/>
         </p:nvSpPr>
         <p:spPr>
           <a:xfrm>
             <a:off x="1874520" y="4096512"/>
-            <a:ext cx="6903720" cy="658368"/>
+            <a:ext cx="6903720" cy="804672"/>
           </a:xfrm>
           <a:prstGeom prst="rect">
             <a:avLst>
-              <a:gd name="adj" fmla="val 8333"/>
+              <a:gd name="adj" fmla="val 6818"/>
             </a:avLst>
           </a:prstGeom>
           <a:solidFill>
@@ -23485,18 +23629,18 @@
       </p:sp>
       <p:sp>
         <p:nvSpPr>
-          <p:cNvPr id="43" name="Shape 41"/>
-          <p:cNvSpPr/>
-          <p:nvPr/>
-        </p:nvSpPr>
-        <p:spPr>
-          <a:xfrm>
-            <a:off x="2124837" y="4169664"/>
-            <a:ext cx="685800" cy="475488"/>
+          <p:cNvPr id="46" name="Shape 44"/>
+          <p:cNvSpPr/>
+          <p:nvPr/>
+        </p:nvSpPr>
+        <p:spPr>
+          <a:xfrm>
+            <a:off x="2023872" y="4169664"/>
+            <a:ext cx="685800" cy="384048"/>
           </a:xfrm>
           <a:prstGeom prst="rect">
             <a:avLst>
-              <a:gd name="adj" fmla="val 7692"/>
+              <a:gd name="adj" fmla="val 9524"/>
             </a:avLst>
           </a:prstGeom>
           <a:solidFill>
@@ -23512,14 +23656,14 @@
       </p:sp>
       <p:sp>
         <p:nvSpPr>
-          <p:cNvPr id="44" name="Text 42"/>
-          <p:cNvSpPr/>
-          <p:nvPr/>
-        </p:nvSpPr>
-        <p:spPr>
-          <a:xfrm>
-            <a:off x="2124837" y="4169664"/>
-            <a:ext cx="685800" cy="475488"/>
+          <p:cNvPr id="47" name="Text 45"/>
+          <p:cNvSpPr/>
+          <p:nvPr/>
+        </p:nvSpPr>
+        <p:spPr>
+          <a:xfrm>
+            <a:off x="2023872" y="4169664"/>
+            <a:ext cx="685800" cy="384048"/>
           </a:xfrm>
           <a:prstGeom prst="rect">
             <a:avLst/>
@@ -23543,7 +23687,7 @@
                 <a:ea typeface="Trebuchet MS" pitchFamily="34" charset="-122"/>
                 <a:cs typeface="Trebuchet MS" pitchFamily="34" charset="-120"/>
               </a:rPr>
-              <a:t>o</a:t>
+              <a:t>c</a:t>
             </a:r>
             <a:endParaRPr lang="en-US" sz="900" dirty="0"/>
           </a:p>
@@ -23551,18 +23695,57 @@
       </p:sp>
       <p:sp>
         <p:nvSpPr>
-          <p:cNvPr id="45" name="Shape 43"/>
-          <p:cNvSpPr/>
-          <p:nvPr/>
-        </p:nvSpPr>
-        <p:spPr>
-          <a:xfrm>
-            <a:off x="3033522" y="4169664"/>
-            <a:ext cx="685800" cy="475488"/>
+          <p:cNvPr id="48" name="Text 46"/>
+          <p:cNvSpPr/>
+          <p:nvPr/>
+        </p:nvSpPr>
+        <p:spPr>
+          <a:xfrm>
+            <a:off x="2023872" y="4572000"/>
+            <a:ext cx="685800" cy="219456"/>
+          </a:xfrm>
+          <a:prstGeom prst="rect">
+            <a:avLst/>
+          </a:prstGeom>
+          <a:noFill/>
+          <a:ln/>
+        </p:spPr>
+        <p:txBody>
+          <a:bodyPr wrap="square" lIns="0" tIns="0" rIns="0" bIns="0" rtlCol="0" anchor="t"/>
+          <a:lstStyle/>
+          <a:p>
+            <a:pPr algn="ctr" indent="0" marL="0">
+              <a:buNone/>
+            </a:pPr>
+            <a:r>
+              <a:rPr lang="en-US" sz="750" i="1" dirty="0">
+                <a:solidFill>
+                  <a:srgbClr val="94A3B8"/>
+                </a:solidFill>
+                <a:latin typeface="Calibri" pitchFamily="34" charset="0"/>
+                <a:ea typeface="Calibri" pitchFamily="34" charset="-122"/>
+                <a:cs typeface="Calibri" pitchFamily="34" charset="-120"/>
+              </a:rPr>
+              <a:t>/k/</a:t>
+            </a:r>
+            <a:endParaRPr lang="en-US" sz="750" dirty="0"/>
+          </a:p>
+        </p:txBody>
+      </p:sp>
+      <p:sp>
+        <p:nvSpPr>
+          <p:cNvPr id="49" name="Shape 47"/>
+          <p:cNvSpPr/>
+          <p:nvPr/>
+        </p:nvSpPr>
+        <p:spPr>
+          <a:xfrm>
+            <a:off x="2831592" y="4169664"/>
+            <a:ext cx="685800" cy="384048"/>
           </a:xfrm>
           <a:prstGeom prst="rect">
             <a:avLst>
-              <a:gd name="adj" fmla="val 7692"/>
+              <a:gd name="adj" fmla="val 9524"/>
             </a:avLst>
           </a:prstGeom>
           <a:solidFill>
@@ -23578,14 +23761,14 @@
       </p:sp>
       <p:sp>
         <p:nvSpPr>
-          <p:cNvPr id="46" name="Text 44"/>
-          <p:cNvSpPr/>
-          <p:nvPr/>
-        </p:nvSpPr>
-        <p:spPr>
-          <a:xfrm>
-            <a:off x="3033522" y="4169664"/>
-            <a:ext cx="685800" cy="475488"/>
+          <p:cNvPr id="50" name="Text 48"/>
+          <p:cNvSpPr/>
+          <p:nvPr/>
+        </p:nvSpPr>
+        <p:spPr>
+          <a:xfrm>
+            <a:off x="2831592" y="4169664"/>
+            <a:ext cx="685800" cy="384048"/>
           </a:xfrm>
           <a:prstGeom prst="rect">
             <a:avLst/>
@@ -23609,7 +23792,7 @@
                 <a:ea typeface="Trebuchet MS" pitchFamily="34" charset="-122"/>
                 <a:cs typeface="Trebuchet MS" pitchFamily="34" charset="-120"/>
               </a:rPr>
-              <a:t>p</a:t>
+              <a:t>o</a:t>
             </a:r>
             <a:endParaRPr lang="en-US" sz="900" dirty="0"/>
           </a:p>
@@ -23617,18 +23800,18 @@
       </p:sp>
       <p:sp>
         <p:nvSpPr>
-          <p:cNvPr id="47" name="Shape 45"/>
-          <p:cNvSpPr/>
-          <p:nvPr/>
-        </p:nvSpPr>
-        <p:spPr>
-          <a:xfrm>
-            <a:off x="3942207" y="4169664"/>
-            <a:ext cx="685800" cy="475488"/>
+          <p:cNvPr id="51" name="Shape 49"/>
+          <p:cNvSpPr/>
+          <p:nvPr/>
+        </p:nvSpPr>
+        <p:spPr>
+          <a:xfrm>
+            <a:off x="3639312" y="4169664"/>
+            <a:ext cx="685800" cy="384048"/>
           </a:xfrm>
           <a:prstGeom prst="rect">
             <a:avLst>
-              <a:gd name="adj" fmla="val 7692"/>
+              <a:gd name="adj" fmla="val 9524"/>
             </a:avLst>
           </a:prstGeom>
           <a:solidFill>
@@ -23644,14 +23827,14 @@
       </p:sp>
       <p:sp>
         <p:nvSpPr>
-          <p:cNvPr id="48" name="Text 46"/>
-          <p:cNvSpPr/>
-          <p:nvPr/>
-        </p:nvSpPr>
-        <p:spPr>
-          <a:xfrm>
-            <a:off x="3942207" y="4169664"/>
-            <a:ext cx="685800" cy="475488"/>
+          <p:cNvPr id="52" name="Text 50"/>
+          <p:cNvSpPr/>
+          <p:nvPr/>
+        </p:nvSpPr>
+        <p:spPr>
+          <a:xfrm>
+            <a:off x="3639312" y="4169664"/>
+            <a:ext cx="685800" cy="384048"/>
           </a:xfrm>
           <a:prstGeom prst="rect">
             <a:avLst/>
@@ -23675,7 +23858,7 @@
                 <a:ea typeface="Trebuchet MS" pitchFamily="34" charset="-122"/>
                 <a:cs typeface="Trebuchet MS" pitchFamily="34" charset="-120"/>
               </a:rPr>
-              <a:t>er</a:t>
+              <a:t>o</a:t>
             </a:r>
             <a:endParaRPr lang="en-US" sz="900" dirty="0"/>
           </a:p>
@@ -23683,18 +23866,18 @@
       </p:sp>
       <p:sp>
         <p:nvSpPr>
-          <p:cNvPr id="49" name="Shape 47"/>
-          <p:cNvSpPr/>
-          <p:nvPr/>
-        </p:nvSpPr>
-        <p:spPr>
-          <a:xfrm>
-            <a:off x="4850892" y="4169664"/>
-            <a:ext cx="685800" cy="475488"/>
+          <p:cNvPr id="53" name="Shape 51"/>
+          <p:cNvSpPr/>
+          <p:nvPr/>
+        </p:nvSpPr>
+        <p:spPr>
+          <a:xfrm>
+            <a:off x="4447032" y="4169664"/>
+            <a:ext cx="685800" cy="384048"/>
           </a:xfrm>
           <a:prstGeom prst="rect">
             <a:avLst>
-              <a:gd name="adj" fmla="val 7692"/>
+              <a:gd name="adj" fmla="val 9524"/>
             </a:avLst>
           </a:prstGeom>
           <a:solidFill>
@@ -23710,14 +23893,14 @@
       </p:sp>
       <p:sp>
         <p:nvSpPr>
-          <p:cNvPr id="50" name="Text 48"/>
-          <p:cNvSpPr/>
-          <p:nvPr/>
-        </p:nvSpPr>
-        <p:spPr>
-          <a:xfrm>
-            <a:off x="4850892" y="4169664"/>
-            <a:ext cx="685800" cy="475488"/>
+          <p:cNvPr id="54" name="Text 52"/>
+          <p:cNvSpPr/>
+          <p:nvPr/>
+        </p:nvSpPr>
+        <p:spPr>
+          <a:xfrm>
+            <a:off x="4447032" y="4169664"/>
+            <a:ext cx="685800" cy="384048"/>
           </a:xfrm>
           <a:prstGeom prst="rect">
             <a:avLst/>
@@ -23741,7 +23924,7 @@
                 <a:ea typeface="Trebuchet MS" pitchFamily="34" charset="-122"/>
                 <a:cs typeface="Trebuchet MS" pitchFamily="34" charset="-120"/>
               </a:rPr>
-              <a:t>a</a:t>
+              <a:t>p</a:t>
             </a:r>
             <a:endParaRPr lang="en-US" sz="900" dirty="0"/>
           </a:p>
@@ -23749,18 +23932,18 @@
       </p:sp>
       <p:sp>
         <p:nvSpPr>
-          <p:cNvPr id="51" name="Shape 49"/>
-          <p:cNvSpPr/>
-          <p:nvPr/>
-        </p:nvSpPr>
-        <p:spPr>
-          <a:xfrm>
-            <a:off x="5759577" y="4169664"/>
-            <a:ext cx="685800" cy="475488"/>
+          <p:cNvPr id="55" name="Shape 53"/>
+          <p:cNvSpPr/>
+          <p:nvPr/>
+        </p:nvSpPr>
+        <p:spPr>
+          <a:xfrm>
+            <a:off x="5254752" y="4169664"/>
+            <a:ext cx="685800" cy="384048"/>
           </a:xfrm>
           <a:prstGeom prst="rect">
             <a:avLst>
-              <a:gd name="adj" fmla="val 7692"/>
+              <a:gd name="adj" fmla="val 9524"/>
             </a:avLst>
           </a:prstGeom>
           <a:solidFill>
@@ -23776,14 +23959,14 @@
       </p:sp>
       <p:sp>
         <p:nvSpPr>
-          <p:cNvPr id="52" name="Text 50"/>
-          <p:cNvSpPr/>
-          <p:nvPr/>
-        </p:nvSpPr>
-        <p:spPr>
-          <a:xfrm>
-            <a:off x="5759577" y="4169664"/>
-            <a:ext cx="685800" cy="475488"/>
+          <p:cNvPr id="56" name="Text 54"/>
+          <p:cNvSpPr/>
+          <p:nvPr/>
+        </p:nvSpPr>
+        <p:spPr>
+          <a:xfrm>
+            <a:off x="5254752" y="4169664"/>
+            <a:ext cx="685800" cy="384048"/>
           </a:xfrm>
           <a:prstGeom prst="rect">
             <a:avLst/>
@@ -23807,7 +23990,7 @@
                 <a:ea typeface="Trebuchet MS" pitchFamily="34" charset="-122"/>
                 <a:cs typeface="Trebuchet MS" pitchFamily="34" charset="-120"/>
               </a:rPr>
-              <a:t>t</a:t>
+              <a:t>er</a:t>
             </a:r>
             <a:endParaRPr lang="en-US" sz="900" dirty="0"/>
           </a:p>
@@ -23815,18 +23998,18 @@
       </p:sp>
       <p:sp>
         <p:nvSpPr>
-          <p:cNvPr id="53" name="Shape 51"/>
-          <p:cNvSpPr/>
-          <p:nvPr/>
-        </p:nvSpPr>
-        <p:spPr>
-          <a:xfrm>
-            <a:off x="6668262" y="4169664"/>
-            <a:ext cx="685800" cy="475488"/>
+          <p:cNvPr id="57" name="Shape 55"/>
+          <p:cNvSpPr/>
+          <p:nvPr/>
+        </p:nvSpPr>
+        <p:spPr>
+          <a:xfrm>
+            <a:off x="6062472" y="4169664"/>
+            <a:ext cx="685800" cy="384048"/>
           </a:xfrm>
           <a:prstGeom prst="rect">
             <a:avLst>
-              <a:gd name="adj" fmla="val 7692"/>
+              <a:gd name="adj" fmla="val 9524"/>
             </a:avLst>
           </a:prstGeom>
           <a:solidFill>
@@ -23842,14 +24025,14 @@
       </p:sp>
       <p:sp>
         <p:nvSpPr>
-          <p:cNvPr id="54" name="Text 52"/>
-          <p:cNvSpPr/>
-          <p:nvPr/>
-        </p:nvSpPr>
-        <p:spPr>
-          <a:xfrm>
-            <a:off x="6668262" y="4169664"/>
-            <a:ext cx="685800" cy="475488"/>
+          <p:cNvPr id="58" name="Text 56"/>
+          <p:cNvSpPr/>
+          <p:nvPr/>
+        </p:nvSpPr>
+        <p:spPr>
+          <a:xfrm>
+            <a:off x="6062472" y="4169664"/>
+            <a:ext cx="685800" cy="384048"/>
           </a:xfrm>
           <a:prstGeom prst="rect">
             <a:avLst/>
@@ -23873,7 +24056,7 @@
                 <a:ea typeface="Trebuchet MS" pitchFamily="34" charset="-122"/>
                 <a:cs typeface="Trebuchet MS" pitchFamily="34" charset="-120"/>
               </a:rPr>
-              <a:t>or</a:t>
+              <a:t>a</a:t>
             </a:r>
             <a:endParaRPr lang="en-US" sz="900" dirty="0"/>
           </a:p>
@@ -23881,18 +24064,18 @@
       </p:sp>
       <p:sp>
         <p:nvSpPr>
-          <p:cNvPr id="55" name="Shape 53"/>
-          <p:cNvSpPr/>
-          <p:nvPr/>
-        </p:nvSpPr>
-        <p:spPr>
-          <a:xfrm>
-            <a:off x="7576947" y="4169664"/>
-            <a:ext cx="685800" cy="475488"/>
+          <p:cNvPr id="59" name="Shape 57"/>
+          <p:cNvSpPr/>
+          <p:nvPr/>
+        </p:nvSpPr>
+        <p:spPr>
+          <a:xfrm>
+            <a:off x="6870192" y="4169664"/>
+            <a:ext cx="685800" cy="384048"/>
           </a:xfrm>
           <a:prstGeom prst="rect">
             <a:avLst>
-              <a:gd name="adj" fmla="val 7692"/>
+              <a:gd name="adj" fmla="val 9524"/>
             </a:avLst>
           </a:prstGeom>
           <a:solidFill>
@@ -23908,14 +24091,14 @@
       </p:sp>
       <p:sp>
         <p:nvSpPr>
-          <p:cNvPr id="56" name="Text 54"/>
-          <p:cNvSpPr/>
-          <p:nvPr/>
-        </p:nvSpPr>
-        <p:spPr>
-          <a:xfrm>
-            <a:off x="7576947" y="4169664"/>
-            <a:ext cx="685800" cy="475488"/>
+          <p:cNvPr id="60" name="Text 58"/>
+          <p:cNvSpPr/>
+          <p:nvPr/>
+        </p:nvSpPr>
+        <p:spPr>
+          <a:xfrm>
+            <a:off x="6870192" y="4169664"/>
+            <a:ext cx="685800" cy="384048"/>
           </a:xfrm>
           <a:prstGeom prst="rect">
             <a:avLst/>
@@ -23939,7 +24122,73 @@
                 <a:ea typeface="Trebuchet MS" pitchFamily="34" charset="-122"/>
                 <a:cs typeface="Trebuchet MS" pitchFamily="34" charset="-120"/>
               </a:rPr>
-              <a:t>s</a:t>
+              <a:t>t</a:t>
+            </a:r>
+            <a:endParaRPr lang="en-US" sz="900" dirty="0"/>
+          </a:p>
+        </p:txBody>
+      </p:sp>
+      <p:sp>
+        <p:nvSpPr>
+          <p:cNvPr id="61" name="Shape 59"/>
+          <p:cNvSpPr/>
+          <p:nvPr/>
+        </p:nvSpPr>
+        <p:spPr>
+          <a:xfrm>
+            <a:off x="7677912" y="4169664"/>
+            <a:ext cx="685800" cy="384048"/>
+          </a:xfrm>
+          <a:prstGeom prst="rect">
+            <a:avLst>
+              <a:gd name="adj" fmla="val 9524"/>
+            </a:avLst>
+          </a:prstGeom>
+          <a:solidFill>
+            <a:srgbClr val="FFFFFF"/>
+          </a:solidFill>
+          <a:ln w="12700">
+            <a:solidFill>
+              <a:srgbClr val="DB2777"/>
+            </a:solidFill>
+            <a:prstDash val="solid"/>
+          </a:ln>
+        </p:spPr>
+      </p:sp>
+      <p:sp>
+        <p:nvSpPr>
+          <p:cNvPr id="62" name="Text 60"/>
+          <p:cNvSpPr/>
+          <p:nvPr/>
+        </p:nvSpPr>
+        <p:spPr>
+          <a:xfrm>
+            <a:off x="7677912" y="4169664"/>
+            <a:ext cx="685800" cy="384048"/>
+          </a:xfrm>
+          <a:prstGeom prst="rect">
+            <a:avLst/>
+          </a:prstGeom>
+          <a:noFill/>
+          <a:ln/>
+        </p:spPr>
+        <p:txBody>
+          <a:bodyPr wrap="square" lIns="0" tIns="0" rIns="0" bIns="0" rtlCol="0" anchor="ctr"/>
+          <a:lstStyle/>
+          <a:p>
+            <a:pPr algn="ctr" indent="0" marL="0">
+              <a:buNone/>
+            </a:pPr>
+            <a:r>
+              <a:rPr lang="en-US" sz="900" b="1" dirty="0">
+                <a:solidFill>
+                  <a:srgbClr val="9D174D"/>
+                </a:solidFill>
+                <a:latin typeface="Trebuchet MS" pitchFamily="34" charset="0"/>
+                <a:ea typeface="Trebuchet MS" pitchFamily="34" charset="-122"/>
+                <a:cs typeface="Trebuchet MS" pitchFamily="34" charset="-120"/>
+              </a:rPr>
+              <a:t>ive</a:t>
             </a:r>
             <a:endParaRPr lang="en-US" sz="900" dirty="0"/>
           </a:p>
@@ -24370,7 +24619,7 @@
                 <a:ea typeface="Trebuchet MS" pitchFamily="34" charset="-122"/>
                 <a:cs typeface="Trebuchet MS" pitchFamily="34" charset="-120"/>
               </a:rPr>
-              <a:t>cooperate</a:t>
+              <a:t>operator</a:t>
             </a:r>
             <a:endParaRPr lang="en-US" sz="2800" dirty="0"/>
           </a:p>
@@ -25197,7 +25446,7 @@
                 <a:ea typeface="Trebuchet MS" pitchFamily="34" charset="-122"/>
                 <a:cs typeface="Trebuchet MS" pitchFamily="34" charset="-120"/>
               </a:rPr>
-              <a:t>cooperate</a:t>
+              <a:t>operator</a:t>
             </a:r>
             <a:endParaRPr lang="en-US" sz="2800" dirty="0"/>
           </a:p>
@@ -25286,11 +25535,11 @@
             </a:avLst>
           </a:prstGeom>
           <a:solidFill>
-            <a:srgbClr val="DDD6FE"/>
+            <a:srgbClr val="CCFBF1"/>
           </a:solidFill>
           <a:ln w="19050">
             <a:solidFill>
-              <a:srgbClr val="7C3AED"/>
+              <a:srgbClr val="0D9488"/>
             </a:solidFill>
             <a:prstDash val="solid"/>
           </a:ln>
@@ -25330,13 +25579,13 @@
             <a:r>
               <a:rPr lang="en-US" sz="1300" b="1" dirty="0">
                 <a:solidFill>
-                  <a:srgbClr val="4C1D95"/>
+                  <a:srgbClr val="0F766E"/>
                 </a:solidFill>
                 <a:latin typeface="Trebuchet MS" pitchFamily="34" charset="0"/>
                 <a:ea typeface="Trebuchet MS" pitchFamily="34" charset="-122"/>
                 <a:cs typeface="Trebuchet MS" pitchFamily="34" charset="-120"/>
               </a:rPr>
-              <a:t>co</a:t>
+              <a:t>operate</a:t>
             </a:r>
             <a:endParaRPr lang="en-US" sz="1300" dirty="0"/>
           </a:p>
@@ -25375,7 +25624,7 @@
                 <a:ea typeface="Calibri" pitchFamily="34" charset="-122"/>
                 <a:cs typeface="Calibri" pitchFamily="34" charset="-120"/>
               </a:rPr>
-              <a:t>together, with</a:t>
+              <a:t>to work or function</a:t>
             </a:r>
             <a:endParaRPr lang="en-US" sz="850" dirty="0"/>
           </a:p>
@@ -25383,7 +25632,46 @@
       </p:sp>
       <p:sp>
         <p:nvSpPr>
-          <p:cNvPr id="19" name="Shape 17"/>
+          <p:cNvPr id="19" name="Text 17"/>
+          <p:cNvSpPr/>
+          <p:nvPr/>
+        </p:nvSpPr>
+        <p:spPr>
+          <a:xfrm>
+            <a:off x="2938272" y="2752344"/>
+            <a:ext cx="1828800" cy="182880"/>
+          </a:xfrm>
+          <a:prstGeom prst="rect">
+            <a:avLst/>
+          </a:prstGeom>
+          <a:noFill/>
+          <a:ln/>
+        </p:spPr>
+        <p:txBody>
+          <a:bodyPr wrap="square" lIns="0" tIns="0" rIns="0" bIns="0" rtlCol="0" anchor="t"/>
+          <a:lstStyle/>
+          <a:p>
+            <a:pPr algn="ctr" indent="0" marL="0">
+              <a:buNone/>
+            </a:pPr>
+            <a:r>
+              <a:rPr lang="en-US" sz="700" i="1" dirty="0">
+                <a:solidFill>
+                  <a:srgbClr val="94A3B8"/>
+                </a:solidFill>
+                <a:latin typeface="Calibri" pitchFamily="34" charset="0"/>
+                <a:ea typeface="Calibri" pitchFamily="34" charset="-122"/>
+                <a:cs typeface="Calibri" pitchFamily="34" charset="-120"/>
+              </a:rPr>
+              <a:t>'e' dropped before vowel suffix</a:t>
+            </a:r>
+            <a:endParaRPr lang="en-US" sz="700" dirty="0"/>
+          </a:p>
+        </p:txBody>
+      </p:sp>
+      <p:sp>
+        <p:nvSpPr>
+          <p:cNvPr id="20" name="Shape 18"/>
           <p:cNvSpPr/>
           <p:nvPr/>
         </p:nvSpPr>
@@ -25398,11 +25686,11 @@
             </a:avLst>
           </a:prstGeom>
           <a:solidFill>
-            <a:srgbClr val="CCFBF1"/>
+            <a:srgbClr val="FCE7F3"/>
           </a:solidFill>
           <a:ln w="19050">
             <a:solidFill>
-              <a:srgbClr val="0D9488"/>
+              <a:srgbClr val="DB2777"/>
             </a:solidFill>
             <a:prstDash val="solid"/>
           </a:ln>
@@ -25417,7 +25705,7 @@
       </p:sp>
       <p:sp>
         <p:nvSpPr>
-          <p:cNvPr id="20" name="Text 18"/>
+          <p:cNvPr id="21" name="Text 19"/>
           <p:cNvSpPr/>
           <p:nvPr/>
         </p:nvSpPr>
@@ -25442,13 +25730,13 @@
             <a:r>
               <a:rPr lang="en-US" sz="1300" b="1" dirty="0">
                 <a:solidFill>
-                  <a:srgbClr val="0F766E"/>
+                  <a:srgbClr val="9D174D"/>
                 </a:solidFill>
                 <a:latin typeface="Trebuchet MS" pitchFamily="34" charset="0"/>
                 <a:ea typeface="Trebuchet MS" pitchFamily="34" charset="-122"/>
                 <a:cs typeface="Trebuchet MS" pitchFamily="34" charset="-120"/>
               </a:rPr>
-              <a:t>operate</a:t>
+              <a:t>or</a:t>
             </a:r>
             <a:endParaRPr lang="en-US" sz="1300" dirty="0"/>
           </a:p>
@@ -25456,7 +25744,7 @@
       </p:sp>
       <p:sp>
         <p:nvSpPr>
-          <p:cNvPr id="21" name="Text 19"/>
+          <p:cNvPr id="22" name="Text 20"/>
           <p:cNvSpPr/>
           <p:nvPr/>
         </p:nvSpPr>
@@ -25487,7 +25775,7 @@
                 <a:ea typeface="Calibri" pitchFamily="34" charset="-122"/>
                 <a:cs typeface="Calibri" pitchFamily="34" charset="-120"/>
               </a:rPr>
-              <a:t>to work or function</a:t>
+              <a:t>a person who does something</a:t>
             </a:r>
             <a:endParaRPr lang="en-US" sz="850" dirty="0"/>
           </a:p>
@@ -25495,7 +25783,7 @@
       </p:sp>
       <p:sp>
         <p:nvSpPr>
-          <p:cNvPr id="22" name="Shape 20"/>
+          <p:cNvPr id="23" name="Shape 21"/>
           <p:cNvSpPr/>
           <p:nvPr/>
         </p:nvSpPr>
@@ -25522,7 +25810,7 @@
       </p:sp>
       <p:sp>
         <p:nvSpPr>
-          <p:cNvPr id="23" name="Text 21"/>
+          <p:cNvPr id="24" name="Text 22"/>
           <p:cNvSpPr/>
           <p:nvPr/>
         </p:nvSpPr>
@@ -25561,7 +25849,7 @@
       </p:sp>
       <p:sp>
         <p:nvSpPr>
-          <p:cNvPr id="24" name="Shape 22"/>
+          <p:cNvPr id="25" name="Shape 23"/>
           <p:cNvSpPr/>
           <p:nvPr/>
         </p:nvSpPr>
@@ -25588,7 +25876,7 @@
       </p:sp>
       <p:sp>
         <p:nvSpPr>
-          <p:cNvPr id="25" name="Text 23"/>
+          <p:cNvPr id="26" name="Text 24"/>
           <p:cNvSpPr/>
           <p:nvPr/>
         </p:nvSpPr>
@@ -25627,7 +25915,7 @@
       </p:sp>
       <p:sp>
         <p:nvSpPr>
-          <p:cNvPr id="26" name="Shape 24"/>
+          <p:cNvPr id="27" name="Shape 25"/>
           <p:cNvSpPr/>
           <p:nvPr/>
         </p:nvSpPr>
@@ -25654,7 +25942,7 @@
       </p:sp>
       <p:sp>
         <p:nvSpPr>
-          <p:cNvPr id="27" name="Text 25"/>
+          <p:cNvPr id="28" name="Text 26"/>
           <p:cNvSpPr/>
           <p:nvPr/>
         </p:nvSpPr>
@@ -25693,7 +25981,7 @@
       </p:sp>
       <p:sp>
         <p:nvSpPr>
-          <p:cNvPr id="28" name="Shape 26"/>
+          <p:cNvPr id="29" name="Shape 27"/>
           <p:cNvSpPr/>
           <p:nvPr/>
         </p:nvSpPr>
@@ -25720,7 +26008,7 @@
       </p:sp>
       <p:sp>
         <p:nvSpPr>
-          <p:cNvPr id="29" name="Text 27"/>
+          <p:cNvPr id="30" name="Text 28"/>
           <p:cNvSpPr/>
           <p:nvPr/>
         </p:nvSpPr>
@@ -26901,7 +27189,7 @@
                 <a:ea typeface="Trebuchet MS" pitchFamily="34" charset="-122"/>
                 <a:cs typeface="Trebuchet MS" pitchFamily="34" charset="-120"/>
               </a:rPr>
-              <a:t>cooperate</a:t>
+              <a:t>operator</a:t>
             </a:r>
             <a:endParaRPr lang="en-US" sz="2800" dirty="0"/>
           </a:p>
@@ -26990,11 +27278,11 @@
             </a:avLst>
           </a:prstGeom>
           <a:solidFill>
-            <a:srgbClr val="DDD6FE"/>
+            <a:srgbClr val="CCFBF1"/>
           </a:solidFill>
           <a:ln w="19050">
             <a:solidFill>
-              <a:srgbClr val="7C3AED"/>
+              <a:srgbClr val="0D9488"/>
             </a:solidFill>
             <a:prstDash val="solid"/>
           </a:ln>
@@ -27034,13 +27322,13 @@
             <a:r>
               <a:rPr lang="en-US" sz="1300" b="1" dirty="0">
                 <a:solidFill>
-                  <a:srgbClr val="4C1D95"/>
+                  <a:srgbClr val="0F766E"/>
                 </a:solidFill>
                 <a:latin typeface="Trebuchet MS" pitchFamily="34" charset="0"/>
                 <a:ea typeface="Trebuchet MS" pitchFamily="34" charset="-122"/>
                 <a:cs typeface="Trebuchet MS" pitchFamily="34" charset="-120"/>
               </a:rPr>
-              <a:t>co</a:t>
+              <a:t>operate</a:t>
             </a:r>
             <a:endParaRPr lang="en-US" sz="1300" dirty="0"/>
           </a:p>
@@ -27079,7 +27367,7 @@
                 <a:ea typeface="Calibri" pitchFamily="34" charset="-122"/>
                 <a:cs typeface="Calibri" pitchFamily="34" charset="-120"/>
               </a:rPr>
-              <a:t>together, with</a:t>
+              <a:t>to work or function</a:t>
             </a:r>
             <a:endParaRPr lang="en-US" sz="850" dirty="0"/>
           </a:p>
@@ -27087,7 +27375,46 @@
       </p:sp>
       <p:sp>
         <p:nvSpPr>
-          <p:cNvPr id="19" name="Shape 17"/>
+          <p:cNvPr id="19" name="Text 17"/>
+          <p:cNvSpPr/>
+          <p:nvPr/>
+        </p:nvSpPr>
+        <p:spPr>
+          <a:xfrm>
+            <a:off x="2938272" y="2752344"/>
+            <a:ext cx="1828800" cy="182880"/>
+          </a:xfrm>
+          <a:prstGeom prst="rect">
+            <a:avLst/>
+          </a:prstGeom>
+          <a:noFill/>
+          <a:ln/>
+        </p:spPr>
+        <p:txBody>
+          <a:bodyPr wrap="square" lIns="0" tIns="0" rIns="0" bIns="0" rtlCol="0" anchor="t"/>
+          <a:lstStyle/>
+          <a:p>
+            <a:pPr algn="ctr" indent="0" marL="0">
+              <a:buNone/>
+            </a:pPr>
+            <a:r>
+              <a:rPr lang="en-US" sz="700" i="1" dirty="0">
+                <a:solidFill>
+                  <a:srgbClr val="94A3B8"/>
+                </a:solidFill>
+                <a:latin typeface="Calibri" pitchFamily="34" charset="0"/>
+                <a:ea typeface="Calibri" pitchFamily="34" charset="-122"/>
+                <a:cs typeface="Calibri" pitchFamily="34" charset="-120"/>
+              </a:rPr>
+              <a:t>'e' dropped before vowel suffix</a:t>
+            </a:r>
+            <a:endParaRPr lang="en-US" sz="700" dirty="0"/>
+          </a:p>
+        </p:txBody>
+      </p:sp>
+      <p:sp>
+        <p:nvSpPr>
+          <p:cNvPr id="20" name="Shape 18"/>
           <p:cNvSpPr/>
           <p:nvPr/>
         </p:nvSpPr>
@@ -27102,11 +27429,11 @@
             </a:avLst>
           </a:prstGeom>
           <a:solidFill>
-            <a:srgbClr val="CCFBF1"/>
+            <a:srgbClr val="FCE7F3"/>
           </a:solidFill>
           <a:ln w="19050">
             <a:solidFill>
-              <a:srgbClr val="0D9488"/>
+              <a:srgbClr val="DB2777"/>
             </a:solidFill>
             <a:prstDash val="solid"/>
           </a:ln>
@@ -27121,7 +27448,7 @@
       </p:sp>
       <p:sp>
         <p:nvSpPr>
-          <p:cNvPr id="20" name="Text 18"/>
+          <p:cNvPr id="21" name="Text 19"/>
           <p:cNvSpPr/>
           <p:nvPr/>
         </p:nvSpPr>
@@ -27146,13 +27473,13 @@
             <a:r>
               <a:rPr lang="en-US" sz="1300" b="1" dirty="0">
                 <a:solidFill>
-                  <a:srgbClr val="0F766E"/>
+                  <a:srgbClr val="9D174D"/>
                 </a:solidFill>
                 <a:latin typeface="Trebuchet MS" pitchFamily="34" charset="0"/>
                 <a:ea typeface="Trebuchet MS" pitchFamily="34" charset="-122"/>
                 <a:cs typeface="Trebuchet MS" pitchFamily="34" charset="-120"/>
               </a:rPr>
-              <a:t>operate</a:t>
+              <a:t>or</a:t>
             </a:r>
             <a:endParaRPr lang="en-US" sz="1300" dirty="0"/>
           </a:p>
@@ -27160,7 +27487,7 @@
       </p:sp>
       <p:sp>
         <p:nvSpPr>
-          <p:cNvPr id="21" name="Text 19"/>
+          <p:cNvPr id="22" name="Text 20"/>
           <p:cNvSpPr/>
           <p:nvPr/>
         </p:nvSpPr>
@@ -27191,7 +27518,7 @@
                 <a:ea typeface="Calibri" pitchFamily="34" charset="-122"/>
                 <a:cs typeface="Calibri" pitchFamily="34" charset="-120"/>
               </a:rPr>
-              <a:t>to work or function</a:t>
+              <a:t>a person who does something</a:t>
             </a:r>
             <a:endParaRPr lang="en-US" sz="850" dirty="0"/>
           </a:p>
@@ -27199,7 +27526,7 @@
       </p:sp>
       <p:sp>
         <p:nvSpPr>
-          <p:cNvPr id="22" name="Shape 20"/>
+          <p:cNvPr id="23" name="Shape 21"/>
           <p:cNvSpPr/>
           <p:nvPr/>
         </p:nvSpPr>
@@ -27226,7 +27553,7 @@
       </p:sp>
       <p:sp>
         <p:nvSpPr>
-          <p:cNvPr id="23" name="Text 21"/>
+          <p:cNvPr id="24" name="Text 22"/>
           <p:cNvSpPr/>
           <p:nvPr/>
         </p:nvSpPr>
@@ -27265,7 +27592,7 @@
       </p:sp>
       <p:sp>
         <p:nvSpPr>
-          <p:cNvPr id="24" name="Shape 22"/>
+          <p:cNvPr id="25" name="Shape 23"/>
           <p:cNvSpPr/>
           <p:nvPr/>
         </p:nvSpPr>
@@ -27292,7 +27619,7 @@
       </p:sp>
       <p:sp>
         <p:nvSpPr>
-          <p:cNvPr id="25" name="Shape 23"/>
+          <p:cNvPr id="26" name="Shape 24"/>
           <p:cNvSpPr/>
           <p:nvPr/>
         </p:nvSpPr>
@@ -27319,7 +27646,7 @@
       </p:sp>
       <p:sp>
         <p:nvSpPr>
-          <p:cNvPr id="26" name="Text 24"/>
+          <p:cNvPr id="27" name="Text 25"/>
           <p:cNvSpPr/>
           <p:nvPr/>
         </p:nvSpPr>
@@ -27350,7 +27677,7 @@
                 <a:ea typeface="Trebuchet MS" pitchFamily="34" charset="-122"/>
                 <a:cs typeface="Trebuchet MS" pitchFamily="34" charset="-120"/>
               </a:rPr>
-              <a:t>co</a:t>
+              <a:t>op</a:t>
             </a:r>
             <a:endParaRPr lang="en-US" sz="1400" dirty="0"/>
           </a:p>
@@ -27358,7 +27685,7 @@
       </p:sp>
       <p:sp>
         <p:nvSpPr>
-          <p:cNvPr id="27" name="Text 25"/>
+          <p:cNvPr id="28" name="Text 26"/>
           <p:cNvSpPr/>
           <p:nvPr/>
         </p:nvSpPr>
@@ -27397,7 +27724,7 @@
       </p:sp>
       <p:sp>
         <p:nvSpPr>
-          <p:cNvPr id="28" name="Shape 26"/>
+          <p:cNvPr id="29" name="Shape 27"/>
           <p:cNvSpPr/>
           <p:nvPr/>
         </p:nvSpPr>
@@ -27424,7 +27751,7 @@
       </p:sp>
       <p:sp>
         <p:nvSpPr>
-          <p:cNvPr id="29" name="Text 27"/>
+          <p:cNvPr id="30" name="Text 28"/>
           <p:cNvSpPr/>
           <p:nvPr/>
         </p:nvSpPr>
@@ -27455,7 +27782,7 @@
                 <a:ea typeface="Trebuchet MS" pitchFamily="34" charset="-122"/>
                 <a:cs typeface="Trebuchet MS" pitchFamily="34" charset="-120"/>
               </a:rPr>
-              <a:t>op</a:t>
+              <a:t>er</a:t>
             </a:r>
             <a:endParaRPr lang="en-US" sz="1400" dirty="0"/>
           </a:p>
@@ -27463,7 +27790,7 @@
       </p:sp>
       <p:sp>
         <p:nvSpPr>
-          <p:cNvPr id="30" name="Text 28"/>
+          <p:cNvPr id="31" name="Text 29"/>
           <p:cNvSpPr/>
           <p:nvPr/>
         </p:nvSpPr>
@@ -27502,7 +27829,7 @@
       </p:sp>
       <p:sp>
         <p:nvSpPr>
-          <p:cNvPr id="31" name="Shape 29"/>
+          <p:cNvPr id="32" name="Shape 30"/>
           <p:cNvSpPr/>
           <p:nvPr/>
         </p:nvSpPr>
@@ -27529,7 +27856,7 @@
       </p:sp>
       <p:sp>
         <p:nvSpPr>
-          <p:cNvPr id="32" name="Text 30"/>
+          <p:cNvPr id="33" name="Text 31"/>
           <p:cNvSpPr/>
           <p:nvPr/>
         </p:nvSpPr>
@@ -27560,7 +27887,7 @@
                 <a:ea typeface="Trebuchet MS" pitchFamily="34" charset="-122"/>
                 <a:cs typeface="Trebuchet MS" pitchFamily="34" charset="-120"/>
               </a:rPr>
-              <a:t>er</a:t>
+              <a:t>a</a:t>
             </a:r>
             <a:endParaRPr lang="en-US" sz="1400" dirty="0"/>
           </a:p>
@@ -27568,7 +27895,7 @@
       </p:sp>
       <p:sp>
         <p:nvSpPr>
-          <p:cNvPr id="33" name="Text 31"/>
+          <p:cNvPr id="34" name="Text 32"/>
           <p:cNvSpPr/>
           <p:nvPr/>
         </p:nvSpPr>
@@ -27607,7 +27934,7 @@
       </p:sp>
       <p:sp>
         <p:nvSpPr>
-          <p:cNvPr id="34" name="Shape 32"/>
+          <p:cNvPr id="35" name="Shape 33"/>
           <p:cNvSpPr/>
           <p:nvPr/>
         </p:nvSpPr>
@@ -27634,7 +27961,7 @@
       </p:sp>
       <p:sp>
         <p:nvSpPr>
-          <p:cNvPr id="35" name="Text 33"/>
+          <p:cNvPr id="36" name="Text 34"/>
           <p:cNvSpPr/>
           <p:nvPr/>
         </p:nvSpPr>
@@ -27665,7 +27992,7 @@
                 <a:ea typeface="Trebuchet MS" pitchFamily="34" charset="-122"/>
                 <a:cs typeface="Trebuchet MS" pitchFamily="34" charset="-120"/>
               </a:rPr>
-              <a:t>ate</a:t>
+              <a:t>tor</a:t>
             </a:r>
             <a:endParaRPr lang="en-US" sz="1400" dirty="0"/>
           </a:p>
@@ -27673,7 +28000,7 @@
       </p:sp>
       <p:sp>
         <p:nvSpPr>
-          <p:cNvPr id="36" name="Shape 34"/>
+          <p:cNvPr id="37" name="Shape 35"/>
           <p:cNvSpPr/>
           <p:nvPr/>
         </p:nvSpPr>
@@ -27700,7 +28027,7 @@
       </p:sp>
       <p:sp>
         <p:nvSpPr>
-          <p:cNvPr id="37" name="Text 35"/>
+          <p:cNvPr id="38" name="Text 36"/>
           <p:cNvSpPr/>
           <p:nvPr/>
         </p:nvSpPr>
@@ -27739,7 +28066,7 @@
       </p:sp>
       <p:sp>
         <p:nvSpPr>
-          <p:cNvPr id="38" name="Shape 36"/>
+          <p:cNvPr id="39" name="Shape 37"/>
           <p:cNvSpPr/>
           <p:nvPr/>
         </p:nvSpPr>
@@ -27766,7 +28093,7 @@
       </p:sp>
       <p:sp>
         <p:nvSpPr>
-          <p:cNvPr id="39" name="Text 37"/>
+          <p:cNvPr id="40" name="Text 38"/>
           <p:cNvSpPr/>
           <p:nvPr/>
         </p:nvSpPr>
@@ -28228,7 +28555,7 @@
                 <a:ea typeface="Trebuchet MS" pitchFamily="34" charset="-122"/>
                 <a:cs typeface="Trebuchet MS" pitchFamily="34" charset="-120"/>
               </a:rPr>
-              <a:t>cooperate</a:t>
+              <a:t>operator</a:t>
             </a:r>
             <a:endParaRPr lang="en-US" sz="2800" dirty="0"/>
           </a:p>
@@ -28317,11 +28644,11 @@
             </a:avLst>
           </a:prstGeom>
           <a:solidFill>
-            <a:srgbClr val="DDD6FE"/>
+            <a:srgbClr val="CCFBF1"/>
           </a:solidFill>
           <a:ln w="19050">
             <a:solidFill>
-              <a:srgbClr val="7C3AED"/>
+              <a:srgbClr val="0D9488"/>
             </a:solidFill>
             <a:prstDash val="solid"/>
           </a:ln>
@@ -28361,13 +28688,13 @@
             <a:r>
               <a:rPr lang="en-US" sz="1300" b="1" dirty="0">
                 <a:solidFill>
-                  <a:srgbClr val="4C1D95"/>
+                  <a:srgbClr val="0F766E"/>
                 </a:solidFill>
                 <a:latin typeface="Trebuchet MS" pitchFamily="34" charset="0"/>
                 <a:ea typeface="Trebuchet MS" pitchFamily="34" charset="-122"/>
                 <a:cs typeface="Trebuchet MS" pitchFamily="34" charset="-120"/>
               </a:rPr>
-              <a:t>co</a:t>
+              <a:t>operate</a:t>
             </a:r>
             <a:endParaRPr lang="en-US" sz="1300" dirty="0"/>
           </a:p>
@@ -28406,7 +28733,7 @@
                 <a:ea typeface="Calibri" pitchFamily="34" charset="-122"/>
                 <a:cs typeface="Calibri" pitchFamily="34" charset="-120"/>
               </a:rPr>
-              <a:t>together, with</a:t>
+              <a:t>to work or function</a:t>
             </a:r>
             <a:endParaRPr lang="en-US" sz="850" dirty="0"/>
           </a:p>
@@ -28414,7 +28741,46 @@
       </p:sp>
       <p:sp>
         <p:nvSpPr>
-          <p:cNvPr id="19" name="Shape 17"/>
+          <p:cNvPr id="19" name="Text 17"/>
+          <p:cNvSpPr/>
+          <p:nvPr/>
+        </p:nvSpPr>
+        <p:spPr>
+          <a:xfrm>
+            <a:off x="2938272" y="2752344"/>
+            <a:ext cx="1828800" cy="182880"/>
+          </a:xfrm>
+          <a:prstGeom prst="rect">
+            <a:avLst/>
+          </a:prstGeom>
+          <a:noFill/>
+          <a:ln/>
+        </p:spPr>
+        <p:txBody>
+          <a:bodyPr wrap="square" lIns="0" tIns="0" rIns="0" bIns="0" rtlCol="0" anchor="t"/>
+          <a:lstStyle/>
+          <a:p>
+            <a:pPr algn="ctr" indent="0" marL="0">
+              <a:buNone/>
+            </a:pPr>
+            <a:r>
+              <a:rPr lang="en-US" sz="700" i="1" dirty="0">
+                <a:solidFill>
+                  <a:srgbClr val="94A3B8"/>
+                </a:solidFill>
+                <a:latin typeface="Calibri" pitchFamily="34" charset="0"/>
+                <a:ea typeface="Calibri" pitchFamily="34" charset="-122"/>
+                <a:cs typeface="Calibri" pitchFamily="34" charset="-120"/>
+              </a:rPr>
+              <a:t>'e' dropped before vowel suffix</a:t>
+            </a:r>
+            <a:endParaRPr lang="en-US" sz="700" dirty="0"/>
+          </a:p>
+        </p:txBody>
+      </p:sp>
+      <p:sp>
+        <p:nvSpPr>
+          <p:cNvPr id="20" name="Shape 18"/>
           <p:cNvSpPr/>
           <p:nvPr/>
         </p:nvSpPr>
@@ -28429,11 +28795,11 @@
             </a:avLst>
           </a:prstGeom>
           <a:solidFill>
-            <a:srgbClr val="CCFBF1"/>
+            <a:srgbClr val="FCE7F3"/>
           </a:solidFill>
           <a:ln w="19050">
             <a:solidFill>
-              <a:srgbClr val="0D9488"/>
+              <a:srgbClr val="DB2777"/>
             </a:solidFill>
             <a:prstDash val="solid"/>
           </a:ln>
@@ -28448,7 +28814,7 @@
       </p:sp>
       <p:sp>
         <p:nvSpPr>
-          <p:cNvPr id="20" name="Text 18"/>
+          <p:cNvPr id="21" name="Text 19"/>
           <p:cNvSpPr/>
           <p:nvPr/>
         </p:nvSpPr>
@@ -28473,13 +28839,13 @@
             <a:r>
               <a:rPr lang="en-US" sz="1300" b="1" dirty="0">
                 <a:solidFill>
-                  <a:srgbClr val="0F766E"/>
+                  <a:srgbClr val="9D174D"/>
                 </a:solidFill>
                 <a:latin typeface="Trebuchet MS" pitchFamily="34" charset="0"/>
                 <a:ea typeface="Trebuchet MS" pitchFamily="34" charset="-122"/>
                 <a:cs typeface="Trebuchet MS" pitchFamily="34" charset="-120"/>
               </a:rPr>
-              <a:t>operate</a:t>
+              <a:t>or</a:t>
             </a:r>
             <a:endParaRPr lang="en-US" sz="1300" dirty="0"/>
           </a:p>
@@ -28487,7 +28853,7 @@
       </p:sp>
       <p:sp>
         <p:nvSpPr>
-          <p:cNvPr id="21" name="Text 19"/>
+          <p:cNvPr id="22" name="Text 20"/>
           <p:cNvSpPr/>
           <p:nvPr/>
         </p:nvSpPr>
@@ -28518,7 +28884,7 @@
                 <a:ea typeface="Calibri" pitchFamily="34" charset="-122"/>
                 <a:cs typeface="Calibri" pitchFamily="34" charset="-120"/>
               </a:rPr>
-              <a:t>to work or function</a:t>
+              <a:t>a person who does something</a:t>
             </a:r>
             <a:endParaRPr lang="en-US" sz="850" dirty="0"/>
           </a:p>
@@ -28526,7 +28892,7 @@
       </p:sp>
       <p:sp>
         <p:nvSpPr>
-          <p:cNvPr id="22" name="Shape 20"/>
+          <p:cNvPr id="23" name="Shape 21"/>
           <p:cNvSpPr/>
           <p:nvPr/>
         </p:nvSpPr>
@@ -28553,7 +28919,7 @@
       </p:sp>
       <p:sp>
         <p:nvSpPr>
-          <p:cNvPr id="23" name="Text 21"/>
+          <p:cNvPr id="24" name="Text 22"/>
           <p:cNvSpPr/>
           <p:nvPr/>
         </p:nvSpPr>
@@ -28592,7 +28958,7 @@
       </p:sp>
       <p:sp>
         <p:nvSpPr>
-          <p:cNvPr id="24" name="Shape 22"/>
+          <p:cNvPr id="25" name="Shape 23"/>
           <p:cNvSpPr/>
           <p:nvPr/>
         </p:nvSpPr>
@@ -28619,7 +28985,7 @@
       </p:sp>
       <p:sp>
         <p:nvSpPr>
-          <p:cNvPr id="25" name="Shape 23"/>
+          <p:cNvPr id="26" name="Shape 24"/>
           <p:cNvSpPr/>
           <p:nvPr/>
         </p:nvSpPr>
@@ -28646,7 +29012,7 @@
       </p:sp>
       <p:sp>
         <p:nvSpPr>
-          <p:cNvPr id="26" name="Text 24"/>
+          <p:cNvPr id="27" name="Text 25"/>
           <p:cNvSpPr/>
           <p:nvPr/>
         </p:nvSpPr>
@@ -28677,7 +29043,7 @@
                 <a:ea typeface="Trebuchet MS" pitchFamily="34" charset="-122"/>
                 <a:cs typeface="Trebuchet MS" pitchFamily="34" charset="-120"/>
               </a:rPr>
-              <a:t>co</a:t>
+              <a:t>op</a:t>
             </a:r>
             <a:endParaRPr lang="en-US" sz="1400" dirty="0"/>
           </a:p>
@@ -28685,7 +29051,7 @@
       </p:sp>
       <p:sp>
         <p:nvSpPr>
-          <p:cNvPr id="27" name="Text 25"/>
+          <p:cNvPr id="28" name="Text 26"/>
           <p:cNvSpPr/>
           <p:nvPr/>
         </p:nvSpPr>
@@ -28724,7 +29090,7 @@
       </p:sp>
       <p:sp>
         <p:nvSpPr>
-          <p:cNvPr id="28" name="Shape 26"/>
+          <p:cNvPr id="29" name="Shape 27"/>
           <p:cNvSpPr/>
           <p:nvPr/>
         </p:nvSpPr>
@@ -28751,7 +29117,7 @@
       </p:sp>
       <p:sp>
         <p:nvSpPr>
-          <p:cNvPr id="29" name="Text 27"/>
+          <p:cNvPr id="30" name="Text 28"/>
           <p:cNvSpPr/>
           <p:nvPr/>
         </p:nvSpPr>
@@ -28782,7 +29148,7 @@
                 <a:ea typeface="Trebuchet MS" pitchFamily="34" charset="-122"/>
                 <a:cs typeface="Trebuchet MS" pitchFamily="34" charset="-120"/>
               </a:rPr>
-              <a:t>op</a:t>
+              <a:t>er</a:t>
             </a:r>
             <a:endParaRPr lang="en-US" sz="1400" dirty="0"/>
           </a:p>
@@ -28790,7 +29156,7 @@
       </p:sp>
       <p:sp>
         <p:nvSpPr>
-          <p:cNvPr id="30" name="Text 28"/>
+          <p:cNvPr id="31" name="Text 29"/>
           <p:cNvSpPr/>
           <p:nvPr/>
         </p:nvSpPr>
@@ -28829,7 +29195,7 @@
       </p:sp>
       <p:sp>
         <p:nvSpPr>
-          <p:cNvPr id="31" name="Shape 29"/>
+          <p:cNvPr id="32" name="Shape 30"/>
           <p:cNvSpPr/>
           <p:nvPr/>
         </p:nvSpPr>
@@ -28856,7 +29222,7 @@
       </p:sp>
       <p:sp>
         <p:nvSpPr>
-          <p:cNvPr id="32" name="Text 30"/>
+          <p:cNvPr id="33" name="Text 31"/>
           <p:cNvSpPr/>
           <p:nvPr/>
         </p:nvSpPr>
@@ -28887,7 +29253,7 @@
                 <a:ea typeface="Trebuchet MS" pitchFamily="34" charset="-122"/>
                 <a:cs typeface="Trebuchet MS" pitchFamily="34" charset="-120"/>
               </a:rPr>
-              <a:t>er</a:t>
+              <a:t>a</a:t>
             </a:r>
             <a:endParaRPr lang="en-US" sz="1400" dirty="0"/>
           </a:p>
@@ -28895,7 +29261,7 @@
       </p:sp>
       <p:sp>
         <p:nvSpPr>
-          <p:cNvPr id="33" name="Text 31"/>
+          <p:cNvPr id="34" name="Text 32"/>
           <p:cNvSpPr/>
           <p:nvPr/>
         </p:nvSpPr>
@@ -28934,7 +29300,7 @@
       </p:sp>
       <p:sp>
         <p:nvSpPr>
-          <p:cNvPr id="34" name="Shape 32"/>
+          <p:cNvPr id="35" name="Shape 33"/>
           <p:cNvSpPr/>
           <p:nvPr/>
         </p:nvSpPr>
@@ -28961,7 +29327,7 @@
       </p:sp>
       <p:sp>
         <p:nvSpPr>
-          <p:cNvPr id="35" name="Text 33"/>
+          <p:cNvPr id="36" name="Text 34"/>
           <p:cNvSpPr/>
           <p:nvPr/>
         </p:nvSpPr>
@@ -28992,7 +29358,7 @@
                 <a:ea typeface="Trebuchet MS" pitchFamily="34" charset="-122"/>
                 <a:cs typeface="Trebuchet MS" pitchFamily="34" charset="-120"/>
               </a:rPr>
-              <a:t>ate</a:t>
+              <a:t>tor</a:t>
             </a:r>
             <a:endParaRPr lang="en-US" sz="1400" dirty="0"/>
           </a:p>
@@ -29000,7 +29366,7 @@
       </p:sp>
       <p:sp>
         <p:nvSpPr>
-          <p:cNvPr id="36" name="Shape 34"/>
+          <p:cNvPr id="37" name="Shape 35"/>
           <p:cNvSpPr/>
           <p:nvPr/>
         </p:nvSpPr>
@@ -29027,7 +29393,7 @@
       </p:sp>
       <p:sp>
         <p:nvSpPr>
-          <p:cNvPr id="37" name="Text 35"/>
+          <p:cNvPr id="38" name="Text 36"/>
           <p:cNvSpPr/>
           <p:nvPr/>
         </p:nvSpPr>
@@ -29066,18 +29432,18 @@
       </p:sp>
       <p:sp>
         <p:nvSpPr>
-          <p:cNvPr id="38" name="Shape 36"/>
+          <p:cNvPr id="39" name="Shape 37"/>
           <p:cNvSpPr/>
           <p:nvPr/>
         </p:nvSpPr>
         <p:spPr>
           <a:xfrm>
             <a:off x="1874520" y="4096512"/>
-            <a:ext cx="6903720" cy="804672"/>
+            <a:ext cx="6903720" cy="658368"/>
           </a:xfrm>
           <a:prstGeom prst="rect">
             <a:avLst>
-              <a:gd name="adj" fmla="val 6818"/>
+              <a:gd name="adj" fmla="val 8333"/>
             </a:avLst>
           </a:prstGeom>
           <a:solidFill>
@@ -29093,18 +29459,18 @@
       </p:sp>
       <p:sp>
         <p:nvSpPr>
-          <p:cNvPr id="39" name="Shape 37"/>
-          <p:cNvSpPr/>
-          <p:nvPr/>
-        </p:nvSpPr>
-        <p:spPr>
-          <a:xfrm>
-            <a:off x="2023872" y="4169664"/>
-            <a:ext cx="685800" cy="384048"/>
+          <p:cNvPr id="40" name="Shape 38"/>
+          <p:cNvSpPr/>
+          <p:nvPr/>
+        </p:nvSpPr>
+        <p:spPr>
+          <a:xfrm>
+            <a:off x="2254649" y="4169664"/>
+            <a:ext cx="685800" cy="475488"/>
           </a:xfrm>
           <a:prstGeom prst="rect">
             <a:avLst>
-              <a:gd name="adj" fmla="val 9524"/>
+              <a:gd name="adj" fmla="val 7692"/>
             </a:avLst>
           </a:prstGeom>
           <a:solidFill>
@@ -29120,14 +29486,14 @@
       </p:sp>
       <p:sp>
         <p:nvSpPr>
-          <p:cNvPr id="40" name="Text 38"/>
-          <p:cNvSpPr/>
-          <p:nvPr/>
-        </p:nvSpPr>
-        <p:spPr>
-          <a:xfrm>
-            <a:off x="2023872" y="4169664"/>
-            <a:ext cx="685800" cy="384048"/>
+          <p:cNvPr id="41" name="Text 39"/>
+          <p:cNvSpPr/>
+          <p:nvPr/>
+        </p:nvSpPr>
+        <p:spPr>
+          <a:xfrm>
+            <a:off x="2254649" y="4169664"/>
+            <a:ext cx="685800" cy="475488"/>
           </a:xfrm>
           <a:prstGeom prst="rect">
             <a:avLst/>
@@ -29151,7 +29517,7 @@
                 <a:ea typeface="Trebuchet MS" pitchFamily="34" charset="-122"/>
                 <a:cs typeface="Trebuchet MS" pitchFamily="34" charset="-120"/>
               </a:rPr>
-              <a:t>c</a:t>
+              <a:t>o</a:t>
             </a:r>
             <a:endParaRPr lang="en-US" sz="900" dirty="0"/>
           </a:p>
@@ -29159,57 +29525,18 @@
       </p:sp>
       <p:sp>
         <p:nvSpPr>
-          <p:cNvPr id="41" name="Text 39"/>
-          <p:cNvSpPr/>
-          <p:nvPr/>
-        </p:nvSpPr>
-        <p:spPr>
-          <a:xfrm>
-            <a:off x="2023872" y="4572000"/>
-            <a:ext cx="685800" cy="219456"/>
-          </a:xfrm>
-          <a:prstGeom prst="rect">
-            <a:avLst/>
-          </a:prstGeom>
-          <a:noFill/>
-          <a:ln/>
-        </p:spPr>
-        <p:txBody>
-          <a:bodyPr wrap="square" lIns="0" tIns="0" rIns="0" bIns="0" rtlCol="0" anchor="t"/>
-          <a:lstStyle/>
-          <a:p>
-            <a:pPr algn="ctr" indent="0" marL="0">
-              <a:buNone/>
-            </a:pPr>
-            <a:r>
-              <a:rPr lang="en-US" sz="750" i="1" dirty="0">
-                <a:solidFill>
-                  <a:srgbClr val="94A3B8"/>
-                </a:solidFill>
-                <a:latin typeface="Calibri" pitchFamily="34" charset="0"/>
-                <a:ea typeface="Calibri" pitchFamily="34" charset="-122"/>
-                <a:cs typeface="Calibri" pitchFamily="34" charset="-120"/>
-              </a:rPr>
-              <a:t>/k/</a:t>
-            </a:r>
-            <a:endParaRPr lang="en-US" sz="750" dirty="0"/>
-          </a:p>
-        </p:txBody>
-      </p:sp>
-      <p:sp>
-        <p:nvSpPr>
           <p:cNvPr id="42" name="Shape 40"/>
           <p:cNvSpPr/>
           <p:nvPr/>
         </p:nvSpPr>
         <p:spPr>
           <a:xfrm>
-            <a:off x="2831592" y="4169664"/>
-            <a:ext cx="685800" cy="384048"/>
+            <a:off x="3293146" y="4169664"/>
+            <a:ext cx="685800" cy="475488"/>
           </a:xfrm>
           <a:prstGeom prst="rect">
             <a:avLst>
-              <a:gd name="adj" fmla="val 9524"/>
+              <a:gd name="adj" fmla="val 7692"/>
             </a:avLst>
           </a:prstGeom>
           <a:solidFill>
@@ -29231,8 +29558,8 @@
         </p:nvSpPr>
         <p:spPr>
           <a:xfrm>
-            <a:off x="2831592" y="4169664"/>
-            <a:ext cx="685800" cy="384048"/>
+            <a:off x="3293146" y="4169664"/>
+            <a:ext cx="685800" cy="475488"/>
           </a:xfrm>
           <a:prstGeom prst="rect">
             <a:avLst/>
@@ -29256,7 +29583,7 @@
                 <a:ea typeface="Trebuchet MS" pitchFamily="34" charset="-122"/>
                 <a:cs typeface="Trebuchet MS" pitchFamily="34" charset="-120"/>
               </a:rPr>
-              <a:t>o</a:t>
+              <a:t>p</a:t>
             </a:r>
             <a:endParaRPr lang="en-US" sz="900" dirty="0"/>
           </a:p>
@@ -29270,12 +29597,12 @@
         </p:nvSpPr>
         <p:spPr>
           <a:xfrm>
-            <a:off x="3639312" y="4169664"/>
-            <a:ext cx="685800" cy="384048"/>
+            <a:off x="4331643" y="4169664"/>
+            <a:ext cx="685800" cy="475488"/>
           </a:xfrm>
           <a:prstGeom prst="rect">
             <a:avLst>
-              <a:gd name="adj" fmla="val 9524"/>
+              <a:gd name="adj" fmla="val 7692"/>
             </a:avLst>
           </a:prstGeom>
           <a:solidFill>
@@ -29297,8 +29624,8 @@
         </p:nvSpPr>
         <p:spPr>
           <a:xfrm>
-            <a:off x="3639312" y="4169664"/>
-            <a:ext cx="685800" cy="384048"/>
+            <a:off x="4331643" y="4169664"/>
+            <a:ext cx="685800" cy="475488"/>
           </a:xfrm>
           <a:prstGeom prst="rect">
             <a:avLst/>
@@ -29322,7 +29649,7 @@
                 <a:ea typeface="Trebuchet MS" pitchFamily="34" charset="-122"/>
                 <a:cs typeface="Trebuchet MS" pitchFamily="34" charset="-120"/>
               </a:rPr>
-              <a:t>o</a:t>
+              <a:t>er</a:t>
             </a:r>
             <a:endParaRPr lang="en-US" sz="900" dirty="0"/>
           </a:p>
@@ -29336,12 +29663,12 @@
         </p:nvSpPr>
         <p:spPr>
           <a:xfrm>
-            <a:off x="4447032" y="4169664"/>
-            <a:ext cx="685800" cy="384048"/>
+            <a:off x="5370141" y="4169664"/>
+            <a:ext cx="685800" cy="475488"/>
           </a:xfrm>
           <a:prstGeom prst="rect">
             <a:avLst>
-              <a:gd name="adj" fmla="val 9524"/>
+              <a:gd name="adj" fmla="val 7692"/>
             </a:avLst>
           </a:prstGeom>
           <a:solidFill>
@@ -29363,8 +29690,8 @@
         </p:nvSpPr>
         <p:spPr>
           <a:xfrm>
-            <a:off x="4447032" y="4169664"/>
-            <a:ext cx="685800" cy="384048"/>
+            <a:off x="5370141" y="4169664"/>
+            <a:ext cx="685800" cy="475488"/>
           </a:xfrm>
           <a:prstGeom prst="rect">
             <a:avLst/>
@@ -29388,7 +29715,7 @@
                 <a:ea typeface="Trebuchet MS" pitchFamily="34" charset="-122"/>
                 <a:cs typeface="Trebuchet MS" pitchFamily="34" charset="-120"/>
               </a:rPr>
-              <a:t>p</a:t>
+              <a:t>a</a:t>
             </a:r>
             <a:endParaRPr lang="en-US" sz="900" dirty="0"/>
           </a:p>
@@ -29402,12 +29729,12 @@
         </p:nvSpPr>
         <p:spPr>
           <a:xfrm>
-            <a:off x="5254752" y="4169664"/>
-            <a:ext cx="685800" cy="384048"/>
+            <a:off x="6408638" y="4169664"/>
+            <a:ext cx="685800" cy="475488"/>
           </a:xfrm>
           <a:prstGeom prst="rect">
             <a:avLst>
-              <a:gd name="adj" fmla="val 9524"/>
+              <a:gd name="adj" fmla="val 7692"/>
             </a:avLst>
           </a:prstGeom>
           <a:solidFill>
@@ -29429,8 +29756,8 @@
         </p:nvSpPr>
         <p:spPr>
           <a:xfrm>
-            <a:off x="5254752" y="4169664"/>
-            <a:ext cx="685800" cy="384048"/>
+            <a:off x="6408638" y="4169664"/>
+            <a:ext cx="685800" cy="475488"/>
           </a:xfrm>
           <a:prstGeom prst="rect">
             <a:avLst/>
@@ -29454,7 +29781,7 @@
                 <a:ea typeface="Trebuchet MS" pitchFamily="34" charset="-122"/>
                 <a:cs typeface="Trebuchet MS" pitchFamily="34" charset="-120"/>
               </a:rPr>
-              <a:t>er</a:t>
+              <a:t>t</a:t>
             </a:r>
             <a:endParaRPr lang="en-US" sz="900" dirty="0"/>
           </a:p>
@@ -29468,12 +29795,12 @@
         </p:nvSpPr>
         <p:spPr>
           <a:xfrm>
-            <a:off x="6062472" y="4169664"/>
-            <a:ext cx="685800" cy="384048"/>
+            <a:off x="7447135" y="4169664"/>
+            <a:ext cx="685800" cy="475488"/>
           </a:xfrm>
           <a:prstGeom prst="rect">
             <a:avLst>
-              <a:gd name="adj" fmla="val 9524"/>
+              <a:gd name="adj" fmla="val 7692"/>
             </a:avLst>
           </a:prstGeom>
           <a:solidFill>
@@ -29495,8 +29822,8 @@
         </p:nvSpPr>
         <p:spPr>
           <a:xfrm>
-            <a:off x="6062472" y="4169664"/>
-            <a:ext cx="685800" cy="384048"/>
+            <a:off x="7447135" y="4169664"/>
+            <a:ext cx="685800" cy="475488"/>
           </a:xfrm>
           <a:prstGeom prst="rect">
             <a:avLst/>
@@ -29520,139 +29847,7 @@
                 <a:ea typeface="Trebuchet MS" pitchFamily="34" charset="-122"/>
                 <a:cs typeface="Trebuchet MS" pitchFamily="34" charset="-120"/>
               </a:rPr>
-              <a:t>a</a:t>
-            </a:r>
-            <a:endParaRPr lang="en-US" sz="900" dirty="0"/>
-          </a:p>
-        </p:txBody>
-      </p:sp>
-      <p:sp>
-        <p:nvSpPr>
-          <p:cNvPr id="52" name="Shape 50"/>
-          <p:cNvSpPr/>
-          <p:nvPr/>
-        </p:nvSpPr>
-        <p:spPr>
-          <a:xfrm>
-            <a:off x="6870192" y="4169664"/>
-            <a:ext cx="685800" cy="384048"/>
-          </a:xfrm>
-          <a:prstGeom prst="rect">
-            <a:avLst>
-              <a:gd name="adj" fmla="val 9524"/>
-            </a:avLst>
-          </a:prstGeom>
-          <a:solidFill>
-            <a:srgbClr val="FFFFFF"/>
-          </a:solidFill>
-          <a:ln w="12700">
-            <a:solidFill>
-              <a:srgbClr val="DB2777"/>
-            </a:solidFill>
-            <a:prstDash val="solid"/>
-          </a:ln>
-        </p:spPr>
-      </p:sp>
-      <p:sp>
-        <p:nvSpPr>
-          <p:cNvPr id="53" name="Text 51"/>
-          <p:cNvSpPr/>
-          <p:nvPr/>
-        </p:nvSpPr>
-        <p:spPr>
-          <a:xfrm>
-            <a:off x="6870192" y="4169664"/>
-            <a:ext cx="685800" cy="384048"/>
-          </a:xfrm>
-          <a:prstGeom prst="rect">
-            <a:avLst/>
-          </a:prstGeom>
-          <a:noFill/>
-          <a:ln/>
-        </p:spPr>
-        <p:txBody>
-          <a:bodyPr wrap="square" lIns="0" tIns="0" rIns="0" bIns="0" rtlCol="0" anchor="ctr"/>
-          <a:lstStyle/>
-          <a:p>
-            <a:pPr algn="ctr" indent="0" marL="0">
-              <a:buNone/>
-            </a:pPr>
-            <a:r>
-              <a:rPr lang="en-US" sz="900" b="1" dirty="0">
-                <a:solidFill>
-                  <a:srgbClr val="9D174D"/>
-                </a:solidFill>
-                <a:latin typeface="Trebuchet MS" pitchFamily="34" charset="0"/>
-                <a:ea typeface="Trebuchet MS" pitchFamily="34" charset="-122"/>
-                <a:cs typeface="Trebuchet MS" pitchFamily="34" charset="-120"/>
-              </a:rPr>
-              <a:t>t</a:t>
-            </a:r>
-            <a:endParaRPr lang="en-US" sz="900" dirty="0"/>
-          </a:p>
-        </p:txBody>
-      </p:sp>
-      <p:sp>
-        <p:nvSpPr>
-          <p:cNvPr id="54" name="Shape 52"/>
-          <p:cNvSpPr/>
-          <p:nvPr/>
-        </p:nvSpPr>
-        <p:spPr>
-          <a:xfrm>
-            <a:off x="7677912" y="4169664"/>
-            <a:ext cx="685800" cy="384048"/>
-          </a:xfrm>
-          <a:prstGeom prst="rect">
-            <a:avLst>
-              <a:gd name="adj" fmla="val 9524"/>
-            </a:avLst>
-          </a:prstGeom>
-          <a:solidFill>
-            <a:srgbClr val="FFFFFF"/>
-          </a:solidFill>
-          <a:ln w="12700">
-            <a:solidFill>
-              <a:srgbClr val="DB2777"/>
-            </a:solidFill>
-            <a:prstDash val="solid"/>
-          </a:ln>
-        </p:spPr>
-      </p:sp>
-      <p:sp>
-        <p:nvSpPr>
-          <p:cNvPr id="55" name="Text 53"/>
-          <p:cNvSpPr/>
-          <p:nvPr/>
-        </p:nvSpPr>
-        <p:spPr>
-          <a:xfrm>
-            <a:off x="7677912" y="4169664"/>
-            <a:ext cx="685800" cy="384048"/>
-          </a:xfrm>
-          <a:prstGeom prst="rect">
-            <a:avLst/>
-          </a:prstGeom>
-          <a:noFill/>
-          <a:ln/>
-        </p:spPr>
-        <p:txBody>
-          <a:bodyPr wrap="square" lIns="0" tIns="0" rIns="0" bIns="0" rtlCol="0" anchor="ctr"/>
-          <a:lstStyle/>
-          <a:p>
-            <a:pPr algn="ctr" indent="0" marL="0">
-              <a:buNone/>
-            </a:pPr>
-            <a:r>
-              <a:rPr lang="en-US" sz="900" b="1" dirty="0">
-                <a:solidFill>
-                  <a:srgbClr val="9D174D"/>
-                </a:solidFill>
-                <a:latin typeface="Trebuchet MS" pitchFamily="34" charset="0"/>
-                <a:ea typeface="Trebuchet MS" pitchFamily="34" charset="-122"/>
-                <a:cs typeface="Trebuchet MS" pitchFamily="34" charset="-120"/>
-              </a:rPr>
-              <a:t>e</a:t>
+              <a:t>or</a:t>
             </a:r>
             <a:endParaRPr lang="en-US" sz="900" dirty="0"/>
           </a:p>
@@ -30083,7 +30278,7 @@
                 <a:ea typeface="Trebuchet MS" pitchFamily="34" charset="-122"/>
                 <a:cs typeface="Trebuchet MS" pitchFamily="34" charset="-120"/>
               </a:rPr>
-              <a:t>operation</a:t>
+              <a:t>operating</a:t>
             </a:r>
             <a:endParaRPr lang="en-US" sz="2800" dirty="0"/>
           </a:p>
@@ -30910,7 +31105,7 @@
                 <a:ea typeface="Trebuchet MS" pitchFamily="34" charset="-122"/>
                 <a:cs typeface="Trebuchet MS" pitchFamily="34" charset="-120"/>
               </a:rPr>
-              <a:t>operation</a:t>
+              <a:t>operating</a:t>
             </a:r>
             <a:endParaRPr lang="en-US" sz="2800" dirty="0"/>
           </a:p>
@@ -31200,7 +31395,7 @@
                 <a:ea typeface="Trebuchet MS" pitchFamily="34" charset="-122"/>
                 <a:cs typeface="Trebuchet MS" pitchFamily="34" charset="-120"/>
               </a:rPr>
-              <a:t>ion</a:t>
+              <a:t>ing</a:t>
             </a:r>
             <a:endParaRPr lang="en-US" sz="1300" dirty="0"/>
           </a:p>
@@ -31239,7 +31434,7 @@
                 <a:ea typeface="Calibri" pitchFamily="34" charset="-122"/>
                 <a:cs typeface="Calibri" pitchFamily="34" charset="-120"/>
               </a:rPr>
-              <a:t>act or result of</a:t>
+              <a:t>ongoing action</a:t>
             </a:r>
             <a:endParaRPr lang="en-US" sz="850" dirty="0"/>
           </a:p>
@@ -31934,7 +32129,7 @@
                 <a:ea typeface="Trebuchet MS" pitchFamily="34" charset="-122"/>
                 <a:cs typeface="Trebuchet MS" pitchFamily="34" charset="-120"/>
               </a:rPr>
-              <a:t>operation</a:t>
+              <a:t>operating</a:t>
             </a:r>
             <a:endParaRPr lang="en-US" sz="2800" dirty="0"/>
           </a:p>
@@ -32224,7 +32419,7 @@
                 <a:ea typeface="Trebuchet MS" pitchFamily="34" charset="-122"/>
                 <a:cs typeface="Trebuchet MS" pitchFamily="34" charset="-120"/>
               </a:rPr>
-              <a:t>ion</a:t>
+              <a:t>ing</a:t>
             </a:r>
             <a:endParaRPr lang="en-US" sz="1300" dirty="0"/>
           </a:p>
@@ -32263,7 +32458,7 @@
                 <a:ea typeface="Calibri" pitchFamily="34" charset="-122"/>
                 <a:cs typeface="Calibri" pitchFamily="34" charset="-120"/>
               </a:rPr>
-              <a:t>act or result of</a:t>
+              <a:t>ongoing action</a:t>
             </a:r>
             <a:endParaRPr lang="en-US" sz="850" dirty="0"/>
           </a:p>
@@ -32737,7 +32932,7 @@
                 <a:ea typeface="Trebuchet MS" pitchFamily="34" charset="-122"/>
                 <a:cs typeface="Trebuchet MS" pitchFamily="34" charset="-120"/>
               </a:rPr>
-              <a:t>tion</a:t>
+              <a:t>ting</a:t>
             </a:r>
             <a:endParaRPr lang="en-US" sz="1400" dirty="0"/>
           </a:p>
@@ -33300,7 +33495,7 @@
                 <a:ea typeface="Trebuchet MS" pitchFamily="34" charset="-122"/>
                 <a:cs typeface="Trebuchet MS" pitchFamily="34" charset="-120"/>
               </a:rPr>
-              <a:t>operation</a:t>
+              <a:t>operating</a:t>
             </a:r>
             <a:endParaRPr lang="en-US" sz="2800" dirty="0"/>
           </a:p>
@@ -33590,7 +33785,7 @@
                 <a:ea typeface="Trebuchet MS" pitchFamily="34" charset="-122"/>
                 <a:cs typeface="Trebuchet MS" pitchFamily="34" charset="-120"/>
               </a:rPr>
-              <a:t>ion</a:t>
+              <a:t>ing</a:t>
             </a:r>
             <a:endParaRPr lang="en-US" sz="1300" dirty="0"/>
           </a:p>
@@ -33629,7 +33824,7 @@
                 <a:ea typeface="Calibri" pitchFamily="34" charset="-122"/>
                 <a:cs typeface="Calibri" pitchFamily="34" charset="-120"/>
               </a:rPr>
-              <a:t>act or result of</a:t>
+              <a:t>ongoing action</a:t>
             </a:r>
             <a:endParaRPr lang="en-US" sz="850" dirty="0"/>
           </a:p>
@@ -34103,7 +34298,7 @@
                 <a:ea typeface="Trebuchet MS" pitchFamily="34" charset="-122"/>
                 <a:cs typeface="Trebuchet MS" pitchFamily="34" charset="-120"/>
               </a:rPr>
-              <a:t>tion</a:t>
+              <a:t>ting</a:t>
             </a:r>
             <a:endParaRPr lang="en-US" sz="1400" dirty="0"/>
           </a:p>
@@ -34184,11 +34379,11 @@
         <p:spPr>
           <a:xfrm>
             <a:off x="1874520" y="4096512"/>
-            <a:ext cx="6903720" cy="804672"/>
+            <a:ext cx="6903720" cy="658368"/>
           </a:xfrm>
           <a:prstGeom prst="rect">
             <a:avLst>
-              <a:gd name="adj" fmla="val 6818"/>
+              <a:gd name="adj" fmla="val 8333"/>
             </a:avLst>
           </a:prstGeom>
           <a:solidFill>
@@ -34210,12 +34405,12 @@
         </p:nvSpPr>
         <p:spPr>
           <a:xfrm>
-            <a:off x="2124837" y="4169664"/>
-            <a:ext cx="685800" cy="384048"/>
+            <a:off x="2254649" y="4169664"/>
+            <a:ext cx="685800" cy="475488"/>
           </a:xfrm>
           <a:prstGeom prst="rect">
             <a:avLst>
-              <a:gd name="adj" fmla="val 9524"/>
+              <a:gd name="adj" fmla="val 7692"/>
             </a:avLst>
           </a:prstGeom>
           <a:solidFill>
@@ -34237,8 +34432,8 @@
         </p:nvSpPr>
         <p:spPr>
           <a:xfrm>
-            <a:off x="2124837" y="4169664"/>
-            <a:ext cx="685800" cy="384048"/>
+            <a:off x="2254649" y="4169664"/>
+            <a:ext cx="685800" cy="475488"/>
           </a:xfrm>
           <a:prstGeom prst="rect">
             <a:avLst/>
@@ -34276,12 +34471,12 @@
         </p:nvSpPr>
         <p:spPr>
           <a:xfrm>
-            <a:off x="3033522" y="4169664"/>
-            <a:ext cx="685800" cy="384048"/>
+            <a:off x="3293146" y="4169664"/>
+            <a:ext cx="685800" cy="475488"/>
           </a:xfrm>
           <a:prstGeom prst="rect">
             <a:avLst>
-              <a:gd name="adj" fmla="val 9524"/>
+              <a:gd name="adj" fmla="val 7692"/>
             </a:avLst>
           </a:prstGeom>
           <a:solidFill>
@@ -34303,8 +34498,8 @@
         </p:nvSpPr>
         <p:spPr>
           <a:xfrm>
-            <a:off x="3033522" y="4169664"/>
-            <a:ext cx="685800" cy="384048"/>
+            <a:off x="3293146" y="4169664"/>
+            <a:ext cx="685800" cy="475488"/>
           </a:xfrm>
           <a:prstGeom prst="rect">
             <a:avLst/>
@@ -34342,12 +34537,12 @@
         </p:nvSpPr>
         <p:spPr>
           <a:xfrm>
-            <a:off x="3942207" y="4169664"/>
-            <a:ext cx="685800" cy="384048"/>
+            <a:off x="4331643" y="4169664"/>
+            <a:ext cx="685800" cy="475488"/>
           </a:xfrm>
           <a:prstGeom prst="rect">
             <a:avLst>
-              <a:gd name="adj" fmla="val 9524"/>
+              <a:gd name="adj" fmla="val 7692"/>
             </a:avLst>
           </a:prstGeom>
           <a:solidFill>
@@ -34369,8 +34564,8 @@
         </p:nvSpPr>
         <p:spPr>
           <a:xfrm>
-            <a:off x="3942207" y="4169664"/>
-            <a:ext cx="685800" cy="384048"/>
+            <a:off x="4331643" y="4169664"/>
+            <a:ext cx="685800" cy="475488"/>
           </a:xfrm>
           <a:prstGeom prst="rect">
             <a:avLst/>
@@ -34408,12 +34603,12 @@
         </p:nvSpPr>
         <p:spPr>
           <a:xfrm>
-            <a:off x="4850892" y="4169664"/>
-            <a:ext cx="685800" cy="384048"/>
+            <a:off x="5370141" y="4169664"/>
+            <a:ext cx="685800" cy="475488"/>
           </a:xfrm>
           <a:prstGeom prst="rect">
             <a:avLst>
-              <a:gd name="adj" fmla="val 9524"/>
+              <a:gd name="adj" fmla="val 7692"/>
             </a:avLst>
           </a:prstGeom>
           <a:solidFill>
@@ -34435,8 +34630,8 @@
         </p:nvSpPr>
         <p:spPr>
           <a:xfrm>
-            <a:off x="4850892" y="4169664"/>
-            <a:ext cx="685800" cy="384048"/>
+            <a:off x="5370141" y="4169664"/>
+            <a:ext cx="685800" cy="475488"/>
           </a:xfrm>
           <a:prstGeom prst="rect">
             <a:avLst/>
@@ -34474,12 +34669,12 @@
         </p:nvSpPr>
         <p:spPr>
           <a:xfrm>
-            <a:off x="5759577" y="4169664"/>
-            <a:ext cx="685800" cy="384048"/>
+            <a:off x="6408638" y="4169664"/>
+            <a:ext cx="685800" cy="475488"/>
           </a:xfrm>
           <a:prstGeom prst="rect">
             <a:avLst>
-              <a:gd name="adj" fmla="val 9524"/>
+              <a:gd name="adj" fmla="val 7692"/>
             </a:avLst>
           </a:prstGeom>
           <a:solidFill>
@@ -34501,8 +34696,8 @@
         </p:nvSpPr>
         <p:spPr>
           <a:xfrm>
-            <a:off x="5759577" y="4169664"/>
-            <a:ext cx="685800" cy="384048"/>
+            <a:off x="6408638" y="4169664"/>
+            <a:ext cx="685800" cy="475488"/>
           </a:xfrm>
           <a:prstGeom prst="rect">
             <a:avLst/>
@@ -34534,57 +34729,18 @@
       </p:sp>
       <p:sp>
         <p:nvSpPr>
-          <p:cNvPr id="50" name="Text 48"/>
-          <p:cNvSpPr/>
-          <p:nvPr/>
-        </p:nvSpPr>
-        <p:spPr>
-          <a:xfrm>
-            <a:off x="5759577" y="4572000"/>
-            <a:ext cx="685800" cy="219456"/>
-          </a:xfrm>
-          <a:prstGeom prst="rect">
-            <a:avLst/>
-          </a:prstGeom>
-          <a:noFill/>
-          <a:ln/>
-        </p:spPr>
-        <p:txBody>
-          <a:bodyPr wrap="square" lIns="0" tIns="0" rIns="0" bIns="0" rtlCol="0" anchor="t"/>
-          <a:lstStyle/>
-          <a:p>
-            <a:pPr algn="ctr" indent="0" marL="0">
-              <a:buNone/>
-            </a:pPr>
-            <a:r>
-              <a:rPr lang="en-US" sz="750" i="1" dirty="0">
-                <a:solidFill>
-                  <a:srgbClr val="94A3B8"/>
-                </a:solidFill>
-                <a:latin typeface="Calibri" pitchFamily="34" charset="0"/>
-                <a:ea typeface="Calibri" pitchFamily="34" charset="-122"/>
-                <a:cs typeface="Calibri" pitchFamily="34" charset="-120"/>
-              </a:rPr>
-              <a:t>/sh/</a:t>
-            </a:r>
-            <a:endParaRPr lang="en-US" sz="750" dirty="0"/>
-          </a:p>
-        </p:txBody>
-      </p:sp>
-      <p:sp>
-        <p:nvSpPr>
-          <p:cNvPr id="51" name="Shape 49"/>
-          <p:cNvSpPr/>
-          <p:nvPr/>
-        </p:nvSpPr>
-        <p:spPr>
-          <a:xfrm>
-            <a:off x="6668262" y="4169664"/>
-            <a:ext cx="685800" cy="384048"/>
+          <p:cNvPr id="50" name="Shape 48"/>
+          <p:cNvSpPr/>
+          <p:nvPr/>
+        </p:nvSpPr>
+        <p:spPr>
+          <a:xfrm>
+            <a:off x="7447135" y="4169664"/>
+            <a:ext cx="685800" cy="475488"/>
           </a:xfrm>
           <a:prstGeom prst="rect">
             <a:avLst>
-              <a:gd name="adj" fmla="val 9524"/>
+              <a:gd name="adj" fmla="val 7692"/>
             </a:avLst>
           </a:prstGeom>
           <a:solidFill>
@@ -34600,14 +34756,14 @@
       </p:sp>
       <p:sp>
         <p:nvSpPr>
-          <p:cNvPr id="52" name="Text 50"/>
-          <p:cNvSpPr/>
-          <p:nvPr/>
-        </p:nvSpPr>
-        <p:spPr>
-          <a:xfrm>
-            <a:off x="6668262" y="4169664"/>
-            <a:ext cx="685800" cy="384048"/>
+          <p:cNvPr id="51" name="Text 49"/>
+          <p:cNvSpPr/>
+          <p:nvPr/>
+        </p:nvSpPr>
+        <p:spPr>
+          <a:xfrm>
+            <a:off x="7447135" y="4169664"/>
+            <a:ext cx="685800" cy="475488"/>
           </a:xfrm>
           <a:prstGeom prst="rect">
             <a:avLst/>
@@ -34631,73 +34787,7 @@
                 <a:ea typeface="Trebuchet MS" pitchFamily="34" charset="-122"/>
                 <a:cs typeface="Trebuchet MS" pitchFamily="34" charset="-120"/>
               </a:rPr>
-              <a:t>io</a:t>
-            </a:r>
-            <a:endParaRPr lang="en-US" sz="900" dirty="0"/>
-          </a:p>
-        </p:txBody>
-      </p:sp>
-      <p:sp>
-        <p:nvSpPr>
-          <p:cNvPr id="53" name="Shape 51"/>
-          <p:cNvSpPr/>
-          <p:nvPr/>
-        </p:nvSpPr>
-        <p:spPr>
-          <a:xfrm>
-            <a:off x="7576947" y="4169664"/>
-            <a:ext cx="685800" cy="384048"/>
-          </a:xfrm>
-          <a:prstGeom prst="rect">
-            <a:avLst>
-              <a:gd name="adj" fmla="val 9524"/>
-            </a:avLst>
-          </a:prstGeom>
-          <a:solidFill>
-            <a:srgbClr val="FFFFFF"/>
-          </a:solidFill>
-          <a:ln w="12700">
-            <a:solidFill>
-              <a:srgbClr val="DB2777"/>
-            </a:solidFill>
-            <a:prstDash val="solid"/>
-          </a:ln>
-        </p:spPr>
-      </p:sp>
-      <p:sp>
-        <p:nvSpPr>
-          <p:cNvPr id="54" name="Text 52"/>
-          <p:cNvSpPr/>
-          <p:nvPr/>
-        </p:nvSpPr>
-        <p:spPr>
-          <a:xfrm>
-            <a:off x="7576947" y="4169664"/>
-            <a:ext cx="685800" cy="384048"/>
-          </a:xfrm>
-          <a:prstGeom prst="rect">
-            <a:avLst/>
-          </a:prstGeom>
-          <a:noFill/>
-          <a:ln/>
-        </p:spPr>
-        <p:txBody>
-          <a:bodyPr wrap="square" lIns="0" tIns="0" rIns="0" bIns="0" rtlCol="0" anchor="ctr"/>
-          <a:lstStyle/>
-          <a:p>
-            <a:pPr algn="ctr" indent="0" marL="0">
-              <a:buNone/>
-            </a:pPr>
-            <a:r>
-              <a:rPr lang="en-US" sz="900" b="1" dirty="0">
-                <a:solidFill>
-                  <a:srgbClr val="9D174D"/>
-                </a:solidFill>
-                <a:latin typeface="Trebuchet MS" pitchFamily="34" charset="0"/>
-                <a:ea typeface="Trebuchet MS" pitchFamily="34" charset="-122"/>
-                <a:cs typeface="Trebuchet MS" pitchFamily="34" charset="-120"/>
-              </a:rPr>
-              <a:t>n</a:t>
+              <a:t>ing</a:t>
             </a:r>
             <a:endParaRPr lang="en-US" sz="900" dirty="0"/>
           </a:p>
@@ -36804,7 +36894,7 @@
                 <a:ea typeface="Trebuchet MS" pitchFamily="34" charset="-122"/>
                 <a:cs typeface="Trebuchet MS" pitchFamily="34" charset="-120"/>
               </a:rPr>
-              <a:t>non-</a:t>
+              <a:t>re-</a:t>
             </a:r>
             <a:endParaRPr lang="en-US" sz="1300" dirty="0"/>
           </a:p>
@@ -37110,7 +37200,7 @@
                 <a:ea typeface="Trebuchet MS" pitchFamily="34" charset="-122"/>
                 <a:cs typeface="Trebuchet MS" pitchFamily="34" charset="-120"/>
               </a:rPr>
-              <a:t>mis-</a:t>
+              <a:t>non-</a:t>
             </a:r>
             <a:endParaRPr lang="en-US" sz="1300" dirty="0"/>
           </a:p>
@@ -37502,7 +37592,7 @@
                 <a:ea typeface="Trebuchet MS" pitchFamily="34" charset="-122"/>
                 <a:cs typeface="Trebuchet MS" pitchFamily="34" charset="-120"/>
               </a:rPr>
-              <a:t>operative</a:t>
+              <a:t>cooperative</a:t>
             </a:r>
             <a:endParaRPr lang="en-US" sz="1200" dirty="0"/>
           </a:p>
@@ -37634,7 +37724,7 @@
                 <a:ea typeface="Trebuchet MS" pitchFamily="34" charset="-122"/>
                 <a:cs typeface="Trebuchet MS" pitchFamily="34" charset="-120"/>
               </a:rPr>
-              <a:t>cooperation</a:t>
+              <a:t>operating</a:t>
             </a:r>
             <a:endParaRPr lang="en-US" sz="1200" dirty="0"/>
           </a:p>
@@ -37700,7 +37790,7 @@
                 <a:ea typeface="Trebuchet MS" pitchFamily="34" charset="-122"/>
                 <a:cs typeface="Trebuchet MS" pitchFamily="34" charset="-120"/>
               </a:rPr>
-              <a:t>inoperative</a:t>
+              <a:t>interoperate</a:t>
             </a:r>
             <a:endParaRPr lang="en-US" sz="1200" dirty="0"/>
           </a:p>
@@ -37766,7 +37856,7 @@
                 <a:ea typeface="Trebuchet MS" pitchFamily="34" charset="-122"/>
                 <a:cs typeface="Trebuchet MS" pitchFamily="34" charset="-120"/>
               </a:rPr>
-              <a:t>interoperate</a:t>
+              <a:t>reoperate</a:t>
             </a:r>
             <a:endParaRPr lang="en-US" sz="1200" dirty="0"/>
           </a:p>
@@ -38954,7 +39044,7 @@
                 <a:ea typeface="Calibri" pitchFamily="34" charset="-122"/>
                 <a:cs typeface="Calibri" pitchFamily="34" charset="-120"/>
               </a:rPr>
-              <a:t>1.  The root 'operate' comes from Latin and means to work or function.</a:t>
+              <a:t>1.  The prefix 'co' in 'cooperate' means together or with.</a:t>
             </a:r>
             <a:endParaRPr lang="en-US" sz="1300" dirty="0"/>
           </a:p>
@@ -39093,7 +39183,7 @@
                 <a:ea typeface="Calibri" pitchFamily="34" charset="-122"/>
                 <a:cs typeface="Calibri" pitchFamily="34" charset="-120"/>
               </a:rPr>
-              <a:t>2.  The word 'cooperate' means to refuse to work with others.</a:t>
+              <a:t>2.  The word 'cooperative' means that people refuse to work together.</a:t>
             </a:r>
             <a:endParaRPr lang="en-US" sz="1300" dirty="0"/>
           </a:p>
@@ -39232,7 +39322,7 @@
                 <a:ea typeface="Calibri" pitchFamily="34" charset="-122"/>
                 <a:cs typeface="Calibri" pitchFamily="34" charset="-120"/>
               </a:rPr>
-              <a:t>3.  An 'operator' is a person who runs or controls something.</a:t>
+              <a:t>3.  An operator is a person who makes a machine or system work.</a:t>
             </a:r>
             <a:endParaRPr lang="en-US" sz="1300" dirty="0"/>
           </a:p>
@@ -39371,7 +39461,7 @@
                 <a:ea typeface="Calibri" pitchFamily="34" charset="-122"/>
                 <a:cs typeface="Calibri" pitchFamily="34" charset="-120"/>
               </a:rPr>
-              <a:t>4.  Adding the prefix 'in-' to 'operative' makes a word meaning not working.</a:t>
+              <a:t>4.  The suffix '-ion' in 'operation' changes the word to mean a person who operates.</a:t>
             </a:r>
             <a:endParaRPr lang="en-US" sz="1300" dirty="0"/>
           </a:p>
@@ -39394,11 +39484,11 @@
             </a:avLst>
           </a:prstGeom>
           <a:solidFill>
-            <a:srgbClr val="DCFCE7"/>
-          </a:solidFill>
-          <a:ln w="12700">
-            <a:solidFill>
-              <a:srgbClr val="16A34A"/>
+            <a:srgbClr val="FEE2E2"/>
+          </a:solidFill>
+          <a:ln w="12700">
+            <a:solidFill>
+              <a:srgbClr val="DC2626"/>
             </a:solidFill>
             <a:prstDash val="solid"/>
           </a:ln>
@@ -39431,13 +39521,13 @@
             <a:r>
               <a:rPr lang="en-US" sz="1100" b="1" dirty="0">
                 <a:solidFill>
-                  <a:srgbClr val="16A34A"/>
+                  <a:srgbClr val="DC2626"/>
                 </a:solidFill>
                 <a:latin typeface="Trebuchet MS" pitchFamily="34" charset="0"/>
                 <a:ea typeface="Trebuchet MS" pitchFamily="34" charset="-122"/>
                 <a:cs typeface="Trebuchet MS" pitchFamily="34" charset="-120"/>
               </a:rPr>
-              <a:t>TRUE</a:t>
+              <a:t>FALSE</a:t>
             </a:r>
             <a:endParaRPr lang="en-US" sz="1100" dirty="0"/>
           </a:p>
@@ -39510,7 +39600,7 @@
                 <a:ea typeface="Calibri" pitchFamily="34" charset="-122"/>
                 <a:cs typeface="Calibri" pitchFamily="34" charset="-120"/>
               </a:rPr>
-              <a:t>5.  The suffix '-or' in 'operator' means the action of doing something.</a:t>
+              <a:t>5.  The root 'operate' comes from a Latin word meaning to work.</a:t>
             </a:r>
             <a:endParaRPr lang="en-US" sz="1300" dirty="0"/>
           </a:p>
@@ -39533,11 +39623,11 @@
             </a:avLst>
           </a:prstGeom>
           <a:solidFill>
-            <a:srgbClr val="FEE2E2"/>
-          </a:solidFill>
-          <a:ln w="12700">
-            <a:solidFill>
-              <a:srgbClr val="DC2626"/>
+            <a:srgbClr val="DCFCE7"/>
+          </a:solidFill>
+          <a:ln w="12700">
+            <a:solidFill>
+              <a:srgbClr val="16A34A"/>
             </a:solidFill>
             <a:prstDash val="solid"/>
           </a:ln>
@@ -39570,13 +39660,13 @@
             <a:r>
               <a:rPr lang="en-US" sz="1100" b="1" dirty="0">
                 <a:solidFill>
-                  <a:srgbClr val="DC2626"/>
+                  <a:srgbClr val="16A34A"/>
                 </a:solidFill>
                 <a:latin typeface="Trebuchet MS" pitchFamily="34" charset="0"/>
                 <a:ea typeface="Trebuchet MS" pitchFamily="34" charset="-122"/>
                 <a:cs typeface="Trebuchet MS" pitchFamily="34" charset="-120"/>
               </a:rPr>
-              <a:t>FALSE</a:t>
+              <a:t>TRUE</a:t>
             </a:r>
             <a:endParaRPr lang="en-US" sz="1100" dirty="0"/>
           </a:p>
@@ -40347,7 +40437,7 @@
                 <a:ea typeface="Trebuchet MS" pitchFamily="34" charset="-122"/>
                 <a:cs typeface="Trebuchet MS" pitchFamily="34" charset="-120"/>
               </a:rPr>
-              <a:t>operative</a:t>
+              <a:t>cooperative</a:t>
             </a:r>
             <a:endParaRPr lang="en-US" sz="1300" dirty="0"/>
           </a:p>
@@ -40479,7 +40569,7 @@
                 <a:ea typeface="Trebuchet MS" pitchFamily="34" charset="-122"/>
                 <a:cs typeface="Trebuchet MS" pitchFamily="34" charset="-120"/>
               </a:rPr>
-              <a:t>cooperation</a:t>
+              <a:t>operating</a:t>
             </a:r>
             <a:endParaRPr lang="en-US" sz="1300" dirty="0"/>
           </a:p>
@@ -40545,7 +40635,7 @@
                 <a:ea typeface="Trebuchet MS" pitchFamily="34" charset="-122"/>
                 <a:cs typeface="Trebuchet MS" pitchFamily="34" charset="-120"/>
               </a:rPr>
-              <a:t>inoperative</a:t>
+              <a:t>interoperate</a:t>
             </a:r>
             <a:endParaRPr lang="en-US" sz="1300" dirty="0"/>
           </a:p>
@@ -41483,7 +41573,7 @@
                 <a:ea typeface="Trebuchet MS" pitchFamily="34" charset="-122"/>
                 <a:cs typeface="Trebuchet MS" pitchFamily="34" charset="-120"/>
               </a:rPr>
-              <a:t>non-</a:t>
+              <a:t>re-</a:t>
             </a:r>
             <a:endParaRPr lang="en-US" sz="1300" dirty="0"/>
           </a:p>
@@ -41789,7 +41879,7 @@
                 <a:ea typeface="Trebuchet MS" pitchFamily="34" charset="-122"/>
                 <a:cs typeface="Trebuchet MS" pitchFamily="34" charset="-120"/>
               </a:rPr>
-              <a:t>mis-</a:t>
+              <a:t>non-</a:t>
             </a:r>
             <a:endParaRPr lang="en-US" sz="1300" dirty="0"/>
           </a:p>
@@ -42789,7 +42879,7 @@
                 <a:ea typeface="Calibri" pitchFamily="34" charset="-122"/>
                 <a:cs typeface="Calibri" pitchFamily="34" charset="-120"/>
               </a:rPr>
-              <a:t>Not working or not able to function properly.</a:t>
+              <a:t>When different systems or machines are able to work together with each other.</a:t>
             </a:r>
             <a:endParaRPr lang="en-US" sz="1200" dirty="0"/>
           </a:p>
@@ -42928,7 +43018,7 @@
                 <a:ea typeface="Calibri" pitchFamily="34" charset="-122"/>
                 <a:cs typeface="Calibri" pitchFamily="34" charset="-120"/>
               </a:rPr>
-              <a:t>Something that is working and in action, or a worker who does a skilled job.</a:t>
+              <a:t>When people work together helpfully and willingly to get something done.</a:t>
             </a:r>
             <a:endParaRPr lang="en-US" sz="1200" dirty="0"/>
           </a:p>
@@ -43067,7 +43157,7 @@
                 <a:ea typeface="Calibri" pitchFamily="34" charset="-122"/>
                 <a:cs typeface="Calibri" pitchFamily="34" charset="-120"/>
               </a:rPr>
-              <a:t>The act of working together with others to achieve a shared goal.</a:t>
+              <a:t>Currently working or running, like an operating machine in a factory.</a:t>
             </a:r>
             <a:endParaRPr lang="en-US" sz="1200" dirty="0"/>
           </a:p>
@@ -43140,7 +43230,7 @@
                 <a:ea typeface="Trebuchet MS" pitchFamily="34" charset="-122"/>
                 <a:cs typeface="Trebuchet MS" pitchFamily="34" charset="-120"/>
               </a:rPr>
-              <a:t>operative</a:t>
+              <a:t>cooperative</a:t>
             </a:r>
             <a:endParaRPr lang="en-US" sz="1200" dirty="0"/>
           </a:p>
@@ -43206,7 +43296,7 @@
                 <a:ea typeface="Calibri" pitchFamily="34" charset="-122"/>
                 <a:cs typeface="Calibri" pitchFamily="34" charset="-120"/>
               </a:rPr>
-              <a:t>To make something work or run, like a machine or a business.</a:t>
+              <a:t>To make something work or to perform a task, like a surgeon operates on a patient.</a:t>
             </a:r>
             <a:endParaRPr lang="en-US" sz="1200" dirty="0"/>
           </a:p>
@@ -43345,7 +43435,7 @@
                 <a:ea typeface="Calibri" pitchFamily="34" charset="-122"/>
                 <a:cs typeface="Calibri" pitchFamily="34" charset="-120"/>
               </a:rPr>
-              <a:t>To work together with other people to get something done.</a:t>
+              <a:t>To work together with others to achieve something.</a:t>
             </a:r>
             <a:endParaRPr lang="en-US" sz="1200" dirty="0"/>
           </a:p>
@@ -43418,7 +43508,7 @@
                 <a:ea typeface="Trebuchet MS" pitchFamily="34" charset="-122"/>
                 <a:cs typeface="Trebuchet MS" pitchFamily="34" charset="-120"/>
               </a:rPr>
-              <a:t>cooperation</a:t>
+              <a:t>operating</a:t>
             </a:r>
             <a:endParaRPr lang="en-US" sz="1200" dirty="0"/>
           </a:p>
@@ -43484,7 +43574,7 @@
                 <a:ea typeface="Calibri" pitchFamily="34" charset="-122"/>
                 <a:cs typeface="Calibri" pitchFamily="34" charset="-120"/>
               </a:rPr>
-              <a:t>A person who controls or runs a machine or telephone service.</a:t>
+              <a:t>A person who makes a machine or system work, like a phone operator.</a:t>
             </a:r>
             <a:endParaRPr lang="en-US" sz="1200" dirty="0"/>
           </a:p>
@@ -43557,7 +43647,7 @@
                 <a:ea typeface="Trebuchet MS" pitchFamily="34" charset="-122"/>
                 <a:cs typeface="Trebuchet MS" pitchFamily="34" charset="-120"/>
               </a:rPr>
-              <a:t>inoperative</a:t>
+              <a:t>interoperate</a:t>
             </a:r>
             <a:endParaRPr lang="en-US" sz="1200" dirty="0"/>
           </a:p>
@@ -43623,7 +43713,7 @@
                 <a:ea typeface="Calibri" pitchFamily="34" charset="-122"/>
                 <a:cs typeface="Calibri" pitchFamily="34" charset="-120"/>
               </a:rPr>
-              <a:t>The act of making something work, or a procedure a doctor performs.</a:t>
+              <a:t>The process of making something work, or a medical procedure done by a doctor.</a:t>
             </a:r>
             <a:endParaRPr lang="en-US" sz="1200" dirty="0"/>
           </a:p>
@@ -44282,7 +44372,7 @@
                 <a:ea typeface="Calibri" pitchFamily="34" charset="-122"/>
                 <a:cs typeface="Calibri" pitchFamily="34" charset="-120"/>
               </a:rPr>
-              <a:t>Everyone needs to cooperate during the fire drill so we can all stay safe.</a:t>
+              <a:t>We all need to cooperate if we want to finish the project before lunchtime.</a:t>
             </a:r>
             <a:endParaRPr lang="en-US" sz="1500" dirty="0"/>
           </a:p>
@@ -44446,7 +44536,7 @@
                 <a:ea typeface="Calibri" pitchFamily="34" charset="-122"/>
                 <a:cs typeface="Calibri" pitchFamily="34" charset="-120"/>
               </a:rPr>
-              <a:t>The old photocopier is inoperative, so we will need to use the one in the library.</a:t>
+              <a:t>The new computer program was not operating correctly, so the technician came to fix it.</a:t>
             </a:r>
             <a:endParaRPr lang="en-US" sz="1500" dirty="0"/>
           </a:p>
